--- a/inbox/Application Aware Networking/federal-aan-conmon-gap-roadmap.pptx
+++ b/inbox/Application Aware Networking/federal-aan-conmon-gap-roadmap.pptx
@@ -13,9 +13,11 @@
     <p:sldId id="261" r:id="rId7"/>
     <p:sldId id="262" r:id="rId8"/>
     <p:sldId id="263" r:id="rId9"/>
+    <p:sldId id="264" r:id="rId10"/>
+    <p:sldId id="265" r:id="rId11"/>
   </p:sldIdLst>
   <p:notesMasterIdLst>
-    <p:notesMasterId r:id="rId10"/>
+    <p:notesMasterId r:id="rId12"/>
   </p:notesMasterIdLst>
   <p:sldSz cx="9144000" cy="5143500"/>
   <p:notesSz cx="5143500" cy="9144000"/>
@@ -552,6 +554,95 @@
 </p:notes>
 </file>
 
+<file path=ppt/notesSlides/notesSlide10.xml><?xml version="1.0" encoding="utf-8"?>
+<p:notes xmlns:a="http://schemas.openxmlformats.org/drawingml/2006/main" xmlns:r="http://schemas.openxmlformats.org/officeDocument/2006/relationships" xmlns:p="http://schemas.openxmlformats.org/presentationml/2006/main">
+  <p:cSld>
+    <p:spTree>
+      <p:nvGrpSpPr>
+        <p:cNvPr id="1" name=""/>
+        <p:cNvGrpSpPr/>
+        <p:nvPr/>
+      </p:nvGrpSpPr>
+      <p:grpSpPr>
+        <a:xfrm>
+          <a:off x="0" y="0"/>
+          <a:ext cx="0" cy="0"/>
+          <a:chOff x="0" y="0"/>
+          <a:chExt cx="0" cy="0"/>
+        </a:xfrm>
+      </p:grpSpPr>
+      <p:sp>
+        <p:nvSpPr>
+          <p:cNvPr id="2" name="Slide Image Placeholder 1"/>
+          <p:cNvSpPr>
+            <a:spLocks noGrp="1" noRot="1" noChangeAspect="1"/>
+          </p:cNvSpPr>
+          <p:nvPr>
+            <p:ph type="sldImg"/>
+          </p:nvPr>
+        </p:nvSpPr>
+        <p:spPr/>
+      </p:sp>
+      <p:sp>
+        <p:nvSpPr>
+          <p:cNvPr id="3" name="Notes Placeholder 2"/>
+          <p:cNvSpPr>
+            <a:spLocks noGrp="1"/>
+          </p:cNvSpPr>
+          <p:nvPr>
+            <p:ph type="body" idx="1"/>
+          </p:nvPr>
+        </p:nvSpPr>
+        <p:spPr/>
+        <p:txBody>
+          <a:bodyPr/>
+          <a:lstStyle/>
+          <a:p>
+            <a:r>
+              <a:rPr lang="en-US" dirty="0"/>
+              <a:t>The closing asks, each with its date. (1) Submit the package: the OSCAL bundle is committed at 29/29 KSIs satisfied with zero open risks and zero POA&amp;M items — the Class B/C window opens August 31, 2026, and the decision to submit belongs to leadership; everything technical is done. (2) File the VDR/VER artifacts with CISA by the December 7, 2026 hard deadline — the machine-readable SBOM plus vendor disclosure that the Part 15 pipeline (Syft, Grype, OpenVEX) produces and Book 19's procedure documents. (3) Map the Release 5.2.0 controls — SA-15(13), SA-24, SI-2(7) — into the Parts 11/15 closure tables before FedRAMP incorporates the deltas into baselines; this is the roadmap's one tracked gap. (4) Check the crypto estate against two clocks: September 21, 2026, when FIPS 140-2-only validated modules lose new-procurement standing (verify 140-3 tracking), and the longer M-23-02 arc — annual crypto inventories feeding the 2030 deprecation and 2035 prohibition of quantum-vulnerable cryptography. Close: the series is complete, the package is ready, and every remaining clock is external. The roadmap document is the single source of truth for federal dates — researched and verified July 7, 2026 — and carries a Date Code; newest code wins. All scoped to FedRAMP Moderate.
+Vendor sources: https://www.fedramp.gov/20x/ | https://www.cisa.gov/news-events/directives/bod-26-04-prioritizing-security-updates-based-risk | uiao repo: inbox/Application Aware Networking/federal-aan-conmon-gap-roadmap.md</a:t>
+            </a:r>
+            <a:endParaRPr lang="en-US" dirty="0"/>
+          </a:p>
+        </p:txBody>
+      </p:sp>
+      <p:sp>
+        <p:nvSpPr>
+          <p:cNvPr id="4" name="Slide Number Placeholder 3"/>
+          <p:cNvSpPr>
+            <a:spLocks noGrp="1"/>
+          </p:cNvSpPr>
+          <p:nvPr>
+            <p:ph type="sldNum" sz="quarter" idx="10"/>
+          </p:nvPr>
+        </p:nvSpPr>
+        <p:spPr/>
+        <p:txBody>
+          <a:bodyPr/>
+          <a:lstStyle/>
+          <a:p>
+            <a:fld id="{F7021451-1387-4CA6-816F-3879F97B5CBC}" type="slidenum">
+              <a:rPr lang="en-US"/>
+              <a:t>10</a:t>
+            </a:fld>
+            <a:endParaRPr lang="en-US"/>
+          </a:p>
+        </p:txBody>
+      </p:sp>
+    </p:spTree>
+    <p:extLst>
+      <p:ext uri="{BB962C8B-B14F-4D97-AF65-F5344CB8AC3E}">
+        <p14:creationId xmlns:p14="http://schemas.microsoft.com/office/powerpoint/2010/main" val="1024086991"/>
+      </p:ext>
+    </p:extLst>
+  </p:cSld>
+  <p:clrMapOvr>
+    <a:masterClrMapping/>
+  </p:clrMapOvr>
+</p:notes>
+</file>
+
 <file path=ppt/notesSlides/notesSlide2.xml><?xml version="1.0" encoding="utf-8"?>
 <p:notes xmlns:a="http://schemas.openxmlformats.org/drawingml/2006/main" xmlns:r="http://schemas.openxmlformats.org/officeDocument/2006/relationships" xmlns:p="http://schemas.openxmlformats.org/presentationml/2006/main">
   <p:cSld>
@@ -1043,7 +1134,7 @@
           <a:p>
             <a:r>
               <a:rPr lang="en-US" dirty="0"/>
-              <a:t>The phase ladder from the roadmap's sequenced implementation plan. Completed: Phases 0 through 4 landed by July 3 — Parts 1-17 delivered, the first seven evidence slots bound, the complete OSCAL AP+AR+POA&amp;M bundle generating, and every KSI theme covered by local rules. Phase 5 (July 4) delivered Part 18's training program, bound slot-08, and activated KSI-022 at high confidence — the last scaffold rule. Phase 6 (July 5) delivered Part 19: the authorization package structure (SSP, SAR, POA&amp;M, OSCAL bundle committed at 29/29 satisfied with zero open risks), the ScubaDrift disposition pipeline replacing the always-satisfied ScuBA guard, the BOD 26-04 VDR/VER submission procedure, and the CA-7 ConMon cadence. Open: Phase 7 — submission — is the amber-ringed action: the authorization package goes to the FedRAMP PMO in the Class B/C window that opens August 31, 2026; the BOD 26-04 VDR/VER artifacts (machine-readable SBOM from the Syft + Grype + OpenVEX pipeline) go to CISA by the December 7, 2026 hard deadline; the 20x ATO issues on the 29/29 assessment results. Phase 8 is the steady state: monthly uiao oscal bundle AR refresh, CISA ScuBA assessment, and POA&amp;M checks; quarterly KSI evidence-quality and training-completion reviews; semi-annual incident-response drill (Part 18) and contingency tabletop (Part 14); annual full KSI re-assessment and ATO renewal preparation.
+              <a:t>Added in the SSA review response. The review observed that the series' 'no alternate closure path' language could be misread as claiming a single vendor path — this slide is the standing correction. Closure necessity names MECHANISM CLASSES ('only port-based authentication closes IA-3' is a protocol claim, not a product claim); every product named in the series is a deployed example of its mechanism, and this table shows the FedRAMP-authorized alternatives per layer — six of the ten layers here, the full matrix (adding IdP, PAM, CLM, MDM) in the roadmap document itself. Two rows worth voicing: the HR system of record row — the provisioning pipeline is source-agnostic BY DESIGN, so substituting Workday or SuccessFactors changes only the middleware adapter and none of the doctrine (Book 04); and the SIEM row — detection content gets rewritten but the slot evidence contracts and OSCAL emitters are format-stable. The doctrine statement for leadership: multiple compliant paths exist before the agency chooses, exactly one after — the selected path becomes mandatory once chosen, because split implementations of a truth plane recreate the fragmented-truth problem the series exists to end. Also note what is deliberately NOT here: the NGTP procurement bid matrices (Vendor A-F) stay out of the architecture corpus — source-selection sensitive; this table answers the leadership question from public information. Verify every candidate's current authorization on the FedRAMP Marketplace at procurement time.
 Vendor sources: https://www.fedramp.gov/20x/ | uiao repo: inbox/Application Aware Networking/federal-aan-conmon-gap-roadmap.md</a:t>
             </a:r>
             <a:endParaRPr lang="en-US" dirty="0"/>
@@ -1132,8 +1223,8 @@
           <a:p>
             <a:r>
               <a:rPr lang="en-US" dirty="0"/>
-              <a:t>The closing asks, each with its date. (1) Submit the package: the OSCAL bundle is committed at 29/29 KSIs satisfied with zero open risks and zero POA&amp;M items — the Class B/C window opens August 31, 2026, and the decision to submit belongs to leadership; everything technical is done. (2) File the VDR/VER artifacts with CISA by the December 7, 2026 hard deadline — the machine-readable SBOM plus vendor disclosure that the Part 15 pipeline (Syft, Grype, OpenVEX) produces and Book 19's procedure documents. (3) Map the Release 5.2.0 controls — SA-15(13), SA-24, SI-2(7) — into the Parts 11/15 closure tables before FedRAMP incorporates the deltas into baselines; this is the roadmap's one tracked gap. (4) Check the crypto estate against two clocks: September 21, 2026, when FIPS 140-2-only validated modules lose new-procurement standing (verify 140-3 tracking), and the longer M-23-02 arc — annual crypto inventories feeding the 2030 deprecation and 2035 prohibition of quantum-vulnerable cryptography. Close: the series is complete, the package is ready, and every remaining clock is external. The roadmap document is the single source of truth for federal dates — researched and verified July 7, 2026 — and carries a Date Code; newest code wins. All scoped to FedRAMP Moderate.
-Vendor sources: https://www.fedramp.gov/20x/ | https://www.cisa.gov/news-events/directives/bod-26-04-prioritizing-security-updates-based-risk | uiao repo: inbox/Application Aware Networking/federal-aan-conmon-gap-roadmap.md</a:t>
+              <a:t>Added in the SSA review response — the adoption artifact the review correctly identified as the missing layer ('without governance clarity, any roadmap cannot be adopted'). The full document is federal-aan-governance-ownership-model; this slide is its shape. Three components: (1) the track ownership matrix — eighteen rows, one per series track, each with exactly one Accountable owner plus R/C/I; it answers the question the review found the agency repeatedly asking: Zero Trust is not a row because it is the doctrine every row implements; SCuBA ownership is the Part 11/13 rows (OIS accountable, CSI Team responsible for the ScubaDrift pipeline); compliance ownership is the Part 19 row, where the Authorizing Official is accountable and everyone else produces evidence. (2) The decision-rights register, D1 through D14 — every decision the series explicitly deferred to governance, each with exactly one decision owner: the DDI Path A/B choice, the Grid Admin accountability model, the RADIUS platform, the NAC binding validation, SD-WAN Manager hosting, TIC 3.0 Use Case E posture, the attribute authority map sign-off, leaver-automation go-live, standing gated-actuation approvals, MAB and ScubaDrift governed-exception approvals (both expiring), boundary-variance escalation, package submission, and vendor substitution within a mechanism class. (3) The go/no-go criteria — six gates protecting field offices and telework from enforcement-phase breakage, drawn from the monitor-before-enforce shape all the series rollouts share. The two-layer rule to voice: the series doctrine stays organization-free so it survives reorganizations; this model is the binding to the current org chart — and because Part 4 made the org chart data, a reorganization updates it by re-derivation. The amber ask: D0 — ratify the model itself; every assignment is a recommendation pending CIO Office / OIS ratification.
+Vendor sources: uiao repo: inbox/Application Aware Networking/federal-aan-conmon-gap-roadmap.md | https://www.fedramp.gov/20x/</a:t>
             </a:r>
             <a:endParaRPr lang="en-US" dirty="0"/>
           </a:p>
@@ -1157,6 +1248,95 @@
             <a:fld id="{F7021451-1387-4CA6-816F-3879F97B5CBC}" type="slidenum">
               <a:rPr lang="en-US"/>
               <a:t>8</a:t>
+            </a:fld>
+            <a:endParaRPr lang="en-US"/>
+          </a:p>
+        </p:txBody>
+      </p:sp>
+    </p:spTree>
+    <p:extLst>
+      <p:ext uri="{BB962C8B-B14F-4D97-AF65-F5344CB8AC3E}">
+        <p14:creationId xmlns:p14="http://schemas.microsoft.com/office/powerpoint/2010/main" val="1024086991"/>
+      </p:ext>
+    </p:extLst>
+  </p:cSld>
+  <p:clrMapOvr>
+    <a:masterClrMapping/>
+  </p:clrMapOvr>
+</p:notes>
+</file>
+
+<file path=ppt/notesSlides/notesSlide9.xml><?xml version="1.0" encoding="utf-8"?>
+<p:notes xmlns:a="http://schemas.openxmlformats.org/drawingml/2006/main" xmlns:r="http://schemas.openxmlformats.org/officeDocument/2006/relationships" xmlns:p="http://schemas.openxmlformats.org/presentationml/2006/main">
+  <p:cSld>
+    <p:spTree>
+      <p:nvGrpSpPr>
+        <p:cNvPr id="1" name=""/>
+        <p:cNvGrpSpPr/>
+        <p:nvPr/>
+      </p:nvGrpSpPr>
+      <p:grpSpPr>
+        <a:xfrm>
+          <a:off x="0" y="0"/>
+          <a:ext cx="0" cy="0"/>
+          <a:chOff x="0" y="0"/>
+          <a:chExt cx="0" cy="0"/>
+        </a:xfrm>
+      </p:grpSpPr>
+      <p:sp>
+        <p:nvSpPr>
+          <p:cNvPr id="2" name="Slide Image Placeholder 1"/>
+          <p:cNvSpPr>
+            <a:spLocks noGrp="1" noRot="1" noChangeAspect="1"/>
+          </p:cNvSpPr>
+          <p:nvPr>
+            <p:ph type="sldImg"/>
+          </p:nvPr>
+        </p:nvSpPr>
+        <p:spPr/>
+      </p:sp>
+      <p:sp>
+        <p:nvSpPr>
+          <p:cNvPr id="3" name="Notes Placeholder 2"/>
+          <p:cNvSpPr>
+            <a:spLocks noGrp="1"/>
+          </p:cNvSpPr>
+          <p:nvPr>
+            <p:ph type="body" idx="1"/>
+          </p:nvPr>
+        </p:nvSpPr>
+        <p:spPr/>
+        <p:txBody>
+          <a:bodyPr/>
+          <a:lstStyle/>
+          <a:p>
+            <a:r>
+              <a:rPr lang="en-US" dirty="0"/>
+              <a:t>The phase ladder from the roadmap's sequenced implementation plan. Completed: Phases 0 through 4 landed by July 3 — Parts 1-17 delivered, the first seven evidence slots bound, the complete OSCAL AP+AR+POA&amp;M bundle generating, and every KSI theme covered by local rules. Phase 5 (July 4) delivered Part 18's training program, bound slot-08, and activated KSI-022 at high confidence — the last scaffold rule. Phase 6 (July 5) delivered Part 19: the authorization package structure (SSP, SAR, POA&amp;M, OSCAL bundle committed at 29/29 satisfied with zero open risks), the ScubaDrift disposition pipeline replacing the always-satisfied ScuBA guard, the BOD 26-04 VDR/VER submission procedure, and the CA-7 ConMon cadence. Open: Phase 7 — submission — is the amber-ringed action: the authorization package goes to the FedRAMP PMO in the Class B/C window that opens August 31, 2026; the BOD 26-04 VDR/VER artifacts (machine-readable SBOM from the Syft + Grype + OpenVEX pipeline) go to CISA by the December 7, 2026 hard deadline; the 20x ATO issues on the 29/29 assessment results. Phase 8 is the steady state: monthly uiao oscal bundle AR refresh, CISA ScuBA assessment, and POA&amp;M checks; quarterly KSI evidence-quality and training-completion reviews; semi-annual incident-response drill (Part 18) and contingency tabletop (Part 14); annual full KSI re-assessment and ATO renewal preparation.
+Vendor sources: https://www.fedramp.gov/20x/ | uiao repo: inbox/Application Aware Networking/federal-aan-conmon-gap-roadmap.md</a:t>
+            </a:r>
+            <a:endParaRPr lang="en-US" dirty="0"/>
+          </a:p>
+        </p:txBody>
+      </p:sp>
+      <p:sp>
+        <p:nvSpPr>
+          <p:cNvPr id="4" name="Slide Number Placeholder 3"/>
+          <p:cNvSpPr>
+            <a:spLocks noGrp="1"/>
+          </p:cNvSpPr>
+          <p:nvPr>
+            <p:ph type="sldNum" sz="quarter" idx="10"/>
+          </p:nvPr>
+        </p:nvSpPr>
+        <p:spPr/>
+        <p:txBody>
+          <a:bodyPr/>
+          <a:lstStyle/>
+          <a:p>
+            <a:fld id="{F7021451-1387-4CA6-816F-3879F97B5CBC}" type="slidenum">
+              <a:rPr lang="en-US"/>
+              <a:t>9</a:t>
             </a:fld>
             <a:endParaRPr lang="en-US"/>
           </a:p>
@@ -1912,7 +2092,7 @@
                 <a:ea typeface="Arial" pitchFamily="34" charset="-122"/>
                 <a:cs typeface="Arial" pitchFamily="34" charset="-120"/>
               </a:rPr>
-              <a:t>Date Code: 2026-07-07 13:16 ET</a:t>
+              <a:t>Date Code: 2026-07-07 15:28 ET</a:t>
             </a:r>
             <a:endParaRPr lang="en-US" sz="1000" dirty="0"/>
           </a:p>
@@ -1979,6 +2159,852 @@
                 <a:cs typeface="Arial" pitchFamily="34" charset="-120"/>
               </a:rPr>
               <a:t>Draft proposal by the CSI Team (Cloud Services Infrastructure) — internal working artifact; not an authorization package or official assessment. All control-closure claims advisory pending formal ATO review.</a:t>
+            </a:r>
+            <a:endParaRPr lang="en-US" sz="950" dirty="0"/>
+          </a:p>
+        </p:txBody>
+      </p:sp>
+    </p:spTree>
+  </p:cSld>
+  <p:clrMapOvr>
+    <a:masterClrMapping/>
+  </p:clrMapOvr>
+</p:sld>
+</file>
+
+<file path=ppt/slides/slide10.xml><?xml version="1.0" encoding="utf-8"?>
+<p:sld xmlns:a="http://schemas.openxmlformats.org/drawingml/2006/main" xmlns:r="http://schemas.openxmlformats.org/officeDocument/2006/relationships" xmlns:p="http://schemas.openxmlformats.org/presentationml/2006/main">
+  <p:cSld name="Slide 10">
+    <p:bg>
+      <p:bgPr>
+        <a:solidFill>
+          <a:srgbClr val="FFFFFF"/>
+        </a:solidFill>
+      </p:bgPr>
+    </p:bg>
+    <p:spTree>
+      <p:nvGrpSpPr>
+        <p:cNvPr id="1" name=""/>
+        <p:cNvGrpSpPr/>
+        <p:nvPr/>
+      </p:nvGrpSpPr>
+      <p:grpSpPr>
+        <a:xfrm>
+          <a:off x="0" y="0"/>
+          <a:ext cx="0" cy="0"/>
+          <a:chOff x="0" y="0"/>
+          <a:chExt cx="0" cy="0"/>
+        </a:xfrm>
+      </p:grpSpPr>
+      <p:sp>
+        <p:nvSpPr>
+          <p:cNvPr id="2" name="Text 0"/>
+          <p:cNvSpPr/>
+          <p:nvPr/>
+        </p:nvSpPr>
+        <p:spPr>
+          <a:xfrm>
+            <a:off x="502920" y="256032"/>
+            <a:ext cx="8229600" cy="274320"/>
+          </a:xfrm>
+          <a:prstGeom prst="rect">
+            <a:avLst/>
+          </a:prstGeom>
+          <a:noFill/>
+          <a:ln/>
+        </p:spPr>
+        <p:txBody>
+          <a:bodyPr wrap="square" lIns="0" tIns="0" rIns="0" bIns="0" rtlCol="0" anchor="ctr"/>
+          <a:lstStyle/>
+          <a:p>
+            <a:pPr indent="0" marL="0">
+              <a:buNone/>
+            </a:pPr>
+            <a:r>
+              <a:rPr lang="en-US" sz="1100" b="1" spc="200" kern="0" dirty="0">
+                <a:solidFill>
+                  <a:srgbClr val="1A9E8F"/>
+                </a:solidFill>
+                <a:latin typeface="Arial" pitchFamily="34" charset="0"/>
+                <a:ea typeface="Arial" pitchFamily="34" charset="-122"/>
+                <a:cs typeface="Arial" pitchFamily="34" charset="-120"/>
+              </a:rPr>
+              <a:t>THE ASKS</a:t>
+            </a:r>
+            <a:endParaRPr lang="en-US" sz="1100" dirty="0"/>
+          </a:p>
+        </p:txBody>
+      </p:sp>
+      <p:sp>
+        <p:nvSpPr>
+          <p:cNvPr id="3" name="Text 1"/>
+          <p:cNvSpPr/>
+          <p:nvPr/>
+        </p:nvSpPr>
+        <p:spPr>
+          <a:xfrm>
+            <a:off x="502920" y="512064"/>
+            <a:ext cx="8138160" cy="566928"/>
+          </a:xfrm>
+          <a:prstGeom prst="rect">
+            <a:avLst/>
+          </a:prstGeom>
+          <a:noFill/>
+          <a:ln/>
+        </p:spPr>
+        <p:txBody>
+          <a:bodyPr wrap="square" lIns="0" tIns="0" rIns="0" bIns="0" rtlCol="0" anchor="ctr"/>
+          <a:lstStyle/>
+          <a:p>
+            <a:pPr indent="0" marL="0">
+              <a:buNone/>
+            </a:pPr>
+            <a:r>
+              <a:rPr lang="en-US" sz="2600" b="1" dirty="0">
+                <a:solidFill>
+                  <a:srgbClr val="1F3A5F"/>
+                </a:solidFill>
+                <a:latin typeface="Arial" pitchFamily="34" charset="0"/>
+                <a:ea typeface="Arial" pitchFamily="34" charset="-122"/>
+                <a:cs typeface="Arial" pitchFamily="34" charset="-120"/>
+              </a:rPr>
+              <a:t>Four actions, four dates</a:t>
+            </a:r>
+            <a:endParaRPr lang="en-US" sz="2600" dirty="0"/>
+          </a:p>
+        </p:txBody>
+      </p:sp>
+      <p:sp>
+        <p:nvSpPr>
+          <p:cNvPr id="4" name="Text 2"/>
+          <p:cNvSpPr/>
+          <p:nvPr/>
+        </p:nvSpPr>
+        <p:spPr>
+          <a:xfrm>
+            <a:off x="502920" y="4864608"/>
+            <a:ext cx="7315200" cy="219456"/>
+          </a:xfrm>
+          <a:prstGeom prst="rect">
+            <a:avLst/>
+          </a:prstGeom>
+          <a:noFill/>
+          <a:ln/>
+        </p:spPr>
+        <p:txBody>
+          <a:bodyPr wrap="square" lIns="0" tIns="0" rIns="0" bIns="0" rtlCol="0" anchor="ctr"/>
+          <a:lstStyle/>
+          <a:p>
+            <a:pPr indent="0" marL="0">
+              <a:buNone/>
+            </a:pPr>
+            <a:r>
+              <a:rPr lang="en-US" sz="800" dirty="0">
+                <a:solidFill>
+                  <a:srgbClr val="5B6B7C"/>
+                </a:solidFill>
+                <a:latin typeface="Arial" pitchFamily="34" charset="0"/>
+                <a:ea typeface="Arial" pitchFamily="34" charset="-122"/>
+                <a:cs typeface="Arial" pitchFamily="34" charset="-120"/>
+              </a:rPr>
+              <a:t>Federal AAN — ConMon Gap Roadmap · CSI Team Draft — Internal · FedRAMP Moderate · Date Code 2026-07-07 15:28 ET</a:t>
+            </a:r>
+            <a:endParaRPr lang="en-US" sz="800" dirty="0"/>
+          </a:p>
+        </p:txBody>
+      </p:sp>
+      <p:sp>
+        <p:nvSpPr>
+          <p:cNvPr id="5" name="Text 3"/>
+          <p:cNvSpPr/>
+          <p:nvPr/>
+        </p:nvSpPr>
+        <p:spPr>
+          <a:xfrm>
+            <a:off x="8412480" y="4864608"/>
+            <a:ext cx="320040" cy="219456"/>
+          </a:xfrm>
+          <a:prstGeom prst="rect">
+            <a:avLst/>
+          </a:prstGeom>
+          <a:noFill/>
+          <a:ln/>
+        </p:spPr>
+        <p:txBody>
+          <a:bodyPr wrap="square" lIns="0" tIns="0" rIns="0" bIns="0" rtlCol="0" anchor="ctr"/>
+          <a:lstStyle/>
+          <a:p>
+            <a:pPr algn="r" indent="0" marL="0">
+              <a:buNone/>
+            </a:pPr>
+            <a:r>
+              <a:rPr lang="en-US" sz="800" dirty="0">
+                <a:solidFill>
+                  <a:srgbClr val="5B6B7C"/>
+                </a:solidFill>
+                <a:latin typeface="Arial" pitchFamily="34" charset="0"/>
+                <a:ea typeface="Arial" pitchFamily="34" charset="-122"/>
+                <a:cs typeface="Arial" pitchFamily="34" charset="-120"/>
+              </a:rPr>
+              <a:t>10</a:t>
+            </a:r>
+            <a:endParaRPr lang="en-US" sz="800" dirty="0"/>
+          </a:p>
+        </p:txBody>
+      </p:sp>
+      <p:sp>
+        <p:nvSpPr>
+          <p:cNvPr id="6" name="Shape 4"/>
+          <p:cNvSpPr/>
+          <p:nvPr/>
+        </p:nvSpPr>
+        <p:spPr>
+          <a:xfrm>
+            <a:off x="502920" y="1234440"/>
+            <a:ext cx="4041648" cy="1481328"/>
+          </a:xfrm>
+          <a:prstGeom prst="roundRect">
+            <a:avLst>
+              <a:gd name="adj" fmla="val 4321"/>
+            </a:avLst>
+          </a:prstGeom>
+          <a:solidFill>
+            <a:srgbClr val="FFFFFF"/>
+          </a:solidFill>
+          <a:ln w="9525">
+            <a:solidFill>
+              <a:srgbClr val="C9D4E0"/>
+            </a:solidFill>
+            <a:prstDash val="solid"/>
+          </a:ln>
+          <a:effectLst>
+            <a:outerShdw sx="100000" sy="100000" kx="0" ky="0" algn="bl" rotWithShape="0" blurRad="88900" dist="25400" dir="2700000">
+              <a:srgbClr val="000000">
+                <a:alpha val="14000"/>
+              </a:srgbClr>
+            </a:outerShdw>
+          </a:effectLst>
+        </p:spPr>
+      </p:sp>
+      <p:sp>
+        <p:nvSpPr>
+          <p:cNvPr id="7" name="Shape 5"/>
+          <p:cNvSpPr/>
+          <p:nvPr/>
+        </p:nvSpPr>
+        <p:spPr>
+          <a:xfrm>
+            <a:off x="630936" y="1362456"/>
+            <a:ext cx="3785616" cy="365760"/>
+          </a:xfrm>
+          <a:prstGeom prst="roundRect">
+            <a:avLst>
+              <a:gd name="adj" fmla="val 12500"/>
+            </a:avLst>
+          </a:prstGeom>
+          <a:solidFill>
+            <a:srgbClr val="F3F5F8"/>
+          </a:solidFill>
+          <a:ln/>
+        </p:spPr>
+      </p:sp>
+      <p:sp>
+        <p:nvSpPr>
+          <p:cNvPr id="8" name="Text 6"/>
+          <p:cNvSpPr/>
+          <p:nvPr/>
+        </p:nvSpPr>
+        <p:spPr>
+          <a:xfrm>
+            <a:off x="758952" y="1362456"/>
+            <a:ext cx="3584448" cy="365760"/>
+          </a:xfrm>
+          <a:prstGeom prst="rect">
+            <a:avLst/>
+          </a:prstGeom>
+          <a:noFill/>
+          <a:ln/>
+        </p:spPr>
+        <p:txBody>
+          <a:bodyPr wrap="square" lIns="0" tIns="0" rIns="0" bIns="0" rtlCol="0" anchor="ctr"/>
+          <a:lstStyle/>
+          <a:p>
+            <a:pPr indent="0" marL="0">
+              <a:buNone/>
+            </a:pPr>
+            <a:r>
+              <a:rPr lang="en-US" sz="1150" b="1" dirty="0">
+                <a:solidFill>
+                  <a:srgbClr val="1A9E8F"/>
+                </a:solidFill>
+                <a:latin typeface="Arial" pitchFamily="34" charset="0"/>
+                <a:ea typeface="Arial" pitchFamily="34" charset="-122"/>
+                <a:cs typeface="Arial" pitchFamily="34" charset="-120"/>
+              </a:rPr>
+              <a:t>Submit the package   </a:t>
+            </a:r>
+            <a:pPr indent="0" marL="0">
+              <a:buNone/>
+            </a:pPr>
+            <a:r>
+              <a:rPr lang="en-US" sz="900" b="1" dirty="0">
+                <a:solidFill>
+                  <a:srgbClr val="5B6B7C"/>
+                </a:solidFill>
+                <a:latin typeface="Arial" pitchFamily="34" charset="0"/>
+                <a:ea typeface="Arial" pitchFamily="34" charset="-122"/>
+                <a:cs typeface="Arial" pitchFamily="34" charset="-120"/>
+              </a:rPr>
+              <a:t>Aug 31, 2026 →</a:t>
+            </a:r>
+            <a:endParaRPr lang="en-US" sz="1150" dirty="0"/>
+          </a:p>
+        </p:txBody>
+      </p:sp>
+      <p:sp>
+        <p:nvSpPr>
+          <p:cNvPr id="9" name="Text 7"/>
+          <p:cNvSpPr/>
+          <p:nvPr/>
+        </p:nvSpPr>
+        <p:spPr>
+          <a:xfrm>
+            <a:off x="685800" y="1801368"/>
+            <a:ext cx="3675888" cy="804672"/>
+          </a:xfrm>
+          <a:prstGeom prst="rect">
+            <a:avLst/>
+          </a:prstGeom>
+          <a:noFill/>
+          <a:ln/>
+        </p:spPr>
+        <p:txBody>
+          <a:bodyPr wrap="square" lIns="0" tIns="0" rIns="0" bIns="0" rtlCol="0" anchor="ctr"/>
+          <a:lstStyle/>
+          <a:p>
+            <a:pPr indent="0" marL="0">
+              <a:buNone/>
+            </a:pPr>
+            <a:r>
+              <a:rPr lang="en-US" sz="950" dirty="0">
+                <a:solidFill>
+                  <a:srgbClr val="1E293B"/>
+                </a:solidFill>
+                <a:latin typeface="Arial" pitchFamily="34" charset="0"/>
+                <a:ea typeface="Arial" pitchFamily="34" charset="-122"/>
+                <a:cs typeface="Arial" pitchFamily="34" charset="-120"/>
+              </a:rPr>
+              <a:t>FedRAMP PMO, Class B/C window — opens Aug 31, 2026. The bundle is committed and ready; the decision to submit is leadership's.</a:t>
+            </a:r>
+            <a:endParaRPr lang="en-US" sz="950" dirty="0"/>
+          </a:p>
+        </p:txBody>
+      </p:sp>
+      <p:sp>
+        <p:nvSpPr>
+          <p:cNvPr id="10" name="Shape 8"/>
+          <p:cNvSpPr/>
+          <p:nvPr/>
+        </p:nvSpPr>
+        <p:spPr>
+          <a:xfrm>
+            <a:off x="4690872" y="1234440"/>
+            <a:ext cx="4041648" cy="1481328"/>
+          </a:xfrm>
+          <a:prstGeom prst="roundRect">
+            <a:avLst>
+              <a:gd name="adj" fmla="val 4321"/>
+            </a:avLst>
+          </a:prstGeom>
+          <a:solidFill>
+            <a:srgbClr val="FFFFFF"/>
+          </a:solidFill>
+          <a:ln w="9525">
+            <a:solidFill>
+              <a:srgbClr val="C9D4E0"/>
+            </a:solidFill>
+            <a:prstDash val="solid"/>
+          </a:ln>
+          <a:effectLst>
+            <a:outerShdw sx="100000" sy="100000" kx="0" ky="0" algn="bl" rotWithShape="0" blurRad="88900" dist="25400" dir="2700000">
+              <a:srgbClr val="000000">
+                <a:alpha val="14000"/>
+              </a:srgbClr>
+            </a:outerShdw>
+          </a:effectLst>
+        </p:spPr>
+      </p:sp>
+      <p:sp>
+        <p:nvSpPr>
+          <p:cNvPr id="11" name="Shape 9"/>
+          <p:cNvSpPr/>
+          <p:nvPr/>
+        </p:nvSpPr>
+        <p:spPr>
+          <a:xfrm>
+            <a:off x="4818888" y="1362456"/>
+            <a:ext cx="3785616" cy="365760"/>
+          </a:xfrm>
+          <a:prstGeom prst="roundRect">
+            <a:avLst>
+              <a:gd name="adj" fmla="val 12500"/>
+            </a:avLst>
+          </a:prstGeom>
+          <a:solidFill>
+            <a:srgbClr val="F3F5F8"/>
+          </a:solidFill>
+          <a:ln/>
+        </p:spPr>
+      </p:sp>
+      <p:sp>
+        <p:nvSpPr>
+          <p:cNvPr id="12" name="Text 10"/>
+          <p:cNvSpPr/>
+          <p:nvPr/>
+        </p:nvSpPr>
+        <p:spPr>
+          <a:xfrm>
+            <a:off x="4946904" y="1362456"/>
+            <a:ext cx="3584448" cy="365760"/>
+          </a:xfrm>
+          <a:prstGeom prst="rect">
+            <a:avLst/>
+          </a:prstGeom>
+          <a:noFill/>
+          <a:ln/>
+        </p:spPr>
+        <p:txBody>
+          <a:bodyPr wrap="square" lIns="0" tIns="0" rIns="0" bIns="0" rtlCol="0" anchor="ctr"/>
+          <a:lstStyle/>
+          <a:p>
+            <a:pPr indent="0" marL="0">
+              <a:buNone/>
+            </a:pPr>
+            <a:r>
+              <a:rPr lang="en-US" sz="1150" b="1" dirty="0">
+                <a:solidFill>
+                  <a:srgbClr val="C0392B"/>
+                </a:solidFill>
+                <a:latin typeface="Arial" pitchFamily="34" charset="0"/>
+                <a:ea typeface="Arial" pitchFamily="34" charset="-122"/>
+                <a:cs typeface="Arial" pitchFamily="34" charset="-120"/>
+              </a:rPr>
+              <a:t>File the VDR/VER artifacts   </a:t>
+            </a:r>
+            <a:pPr indent="0" marL="0">
+              <a:buNone/>
+            </a:pPr>
+            <a:r>
+              <a:rPr lang="en-US" sz="900" b="1" dirty="0">
+                <a:solidFill>
+                  <a:srgbClr val="5B6B7C"/>
+                </a:solidFill>
+                <a:latin typeface="Arial" pitchFamily="34" charset="0"/>
+                <a:ea typeface="Arial" pitchFamily="34" charset="-122"/>
+                <a:cs typeface="Arial" pitchFamily="34" charset="-120"/>
+              </a:rPr>
+              <a:t>by Dec 7, 2026</a:t>
+            </a:r>
+            <a:endParaRPr lang="en-US" sz="1150" dirty="0"/>
+          </a:p>
+        </p:txBody>
+      </p:sp>
+      <p:sp>
+        <p:nvSpPr>
+          <p:cNvPr id="13" name="Text 11"/>
+          <p:cNvSpPr/>
+          <p:nvPr/>
+        </p:nvSpPr>
+        <p:spPr>
+          <a:xfrm>
+            <a:off x="4873752" y="1801368"/>
+            <a:ext cx="3675888" cy="804672"/>
+          </a:xfrm>
+          <a:prstGeom prst="rect">
+            <a:avLst/>
+          </a:prstGeom>
+          <a:noFill/>
+          <a:ln/>
+        </p:spPr>
+        <p:txBody>
+          <a:bodyPr wrap="square" lIns="0" tIns="0" rIns="0" bIns="0" rtlCol="0" anchor="ctr"/>
+          <a:lstStyle/>
+          <a:p>
+            <a:pPr indent="0" marL="0">
+              <a:buNone/>
+            </a:pPr>
+            <a:r>
+              <a:rPr lang="en-US" sz="950" dirty="0">
+                <a:solidFill>
+                  <a:srgbClr val="1E293B"/>
+                </a:solidFill>
+                <a:latin typeface="Arial" pitchFamily="34" charset="0"/>
+                <a:ea typeface="Arial" pitchFamily="34" charset="-122"/>
+                <a:cs typeface="Arial" pitchFamily="34" charset="-120"/>
+              </a:rPr>
+              <a:t>BOD 26-04 submission to CISA — machine-readable SBOM + vendor disclosure from the Part 15 pipeline. Hard deadline.</a:t>
+            </a:r>
+            <a:endParaRPr lang="en-US" sz="950" dirty="0"/>
+          </a:p>
+        </p:txBody>
+      </p:sp>
+      <p:sp>
+        <p:nvSpPr>
+          <p:cNvPr id="14" name="Shape 12"/>
+          <p:cNvSpPr/>
+          <p:nvPr/>
+        </p:nvSpPr>
+        <p:spPr>
+          <a:xfrm>
+            <a:off x="502920" y="2862072"/>
+            <a:ext cx="4041648" cy="1481328"/>
+          </a:xfrm>
+          <a:prstGeom prst="roundRect">
+            <a:avLst>
+              <a:gd name="adj" fmla="val 4321"/>
+            </a:avLst>
+          </a:prstGeom>
+          <a:solidFill>
+            <a:srgbClr val="FFFFFF"/>
+          </a:solidFill>
+          <a:ln w="9525">
+            <a:solidFill>
+              <a:srgbClr val="C9D4E0"/>
+            </a:solidFill>
+            <a:prstDash val="solid"/>
+          </a:ln>
+          <a:effectLst>
+            <a:outerShdw sx="100000" sy="100000" kx="0" ky="0" algn="bl" rotWithShape="0" blurRad="88900" dist="25400" dir="2700000">
+              <a:srgbClr val="000000">
+                <a:alpha val="14000"/>
+              </a:srgbClr>
+            </a:outerShdw>
+          </a:effectLst>
+        </p:spPr>
+      </p:sp>
+      <p:sp>
+        <p:nvSpPr>
+          <p:cNvPr id="15" name="Shape 13"/>
+          <p:cNvSpPr/>
+          <p:nvPr/>
+        </p:nvSpPr>
+        <p:spPr>
+          <a:xfrm>
+            <a:off x="630936" y="2990088"/>
+            <a:ext cx="3785616" cy="365760"/>
+          </a:xfrm>
+          <a:prstGeom prst="roundRect">
+            <a:avLst>
+              <a:gd name="adj" fmla="val 12500"/>
+            </a:avLst>
+          </a:prstGeom>
+          <a:solidFill>
+            <a:srgbClr val="F3F5F8"/>
+          </a:solidFill>
+          <a:ln/>
+        </p:spPr>
+      </p:sp>
+      <p:sp>
+        <p:nvSpPr>
+          <p:cNvPr id="16" name="Text 14"/>
+          <p:cNvSpPr/>
+          <p:nvPr/>
+        </p:nvSpPr>
+        <p:spPr>
+          <a:xfrm>
+            <a:off x="758952" y="2990088"/>
+            <a:ext cx="3584448" cy="365760"/>
+          </a:xfrm>
+          <a:prstGeom prst="rect">
+            <a:avLst/>
+          </a:prstGeom>
+          <a:noFill/>
+          <a:ln/>
+        </p:spPr>
+        <p:txBody>
+          <a:bodyPr wrap="square" lIns="0" tIns="0" rIns="0" bIns="0" rtlCol="0" anchor="ctr"/>
+          <a:lstStyle/>
+          <a:p>
+            <a:pPr indent="0" marL="0">
+              <a:buNone/>
+            </a:pPr>
+            <a:r>
+              <a:rPr lang="en-US" sz="1150" b="1" dirty="0">
+                <a:solidFill>
+                  <a:srgbClr val="D4860B"/>
+                </a:solidFill>
+                <a:latin typeface="Arial" pitchFamily="34" charset="0"/>
+                <a:ea typeface="Arial" pitchFamily="34" charset="-122"/>
+                <a:cs typeface="Arial" pitchFamily="34" charset="-120"/>
+              </a:rPr>
+              <a:t>Map the 5.2.0 controls   </a:t>
+            </a:r>
+            <a:pPr indent="0" marL="0">
+              <a:buNone/>
+            </a:pPr>
+            <a:r>
+              <a:rPr lang="en-US" sz="900" b="1" dirty="0">
+                <a:solidFill>
+                  <a:srgbClr val="5B6B7C"/>
+                </a:solidFill>
+                <a:latin typeface="Arial" pitchFamily="34" charset="0"/>
+                <a:ea typeface="Arial" pitchFamily="34" charset="-122"/>
+                <a:cs typeface="Arial" pitchFamily="34" charset="-120"/>
+              </a:rPr>
+              <a:t>before next assessment</a:t>
+            </a:r>
+            <a:endParaRPr lang="en-US" sz="1150" dirty="0"/>
+          </a:p>
+        </p:txBody>
+      </p:sp>
+      <p:sp>
+        <p:nvSpPr>
+          <p:cNvPr id="17" name="Text 15"/>
+          <p:cNvSpPr/>
+          <p:nvPr/>
+        </p:nvSpPr>
+        <p:spPr>
+          <a:xfrm>
+            <a:off x="685800" y="3429000"/>
+            <a:ext cx="3675888" cy="804672"/>
+          </a:xfrm>
+          <a:prstGeom prst="rect">
+            <a:avLst/>
+          </a:prstGeom>
+          <a:noFill/>
+          <a:ln/>
+        </p:spPr>
+        <p:txBody>
+          <a:bodyPr wrap="square" lIns="0" tIns="0" rIns="0" bIns="0" rtlCol="0" anchor="ctr"/>
+          <a:lstStyle/>
+          <a:p>
+            <a:pPr indent="0" marL="0">
+              <a:buNone/>
+            </a:pPr>
+            <a:r>
+              <a:rPr lang="en-US" sz="950" dirty="0">
+                <a:solidFill>
+                  <a:srgbClr val="1E293B"/>
+                </a:solidFill>
+                <a:latin typeface="Arial" pitchFamily="34" charset="0"/>
+                <a:ea typeface="Arial" pitchFamily="34" charset="-122"/>
+                <a:cs typeface="Arial" pitchFamily="34" charset="-120"/>
+              </a:rPr>
+              <a:t>SA-15(13), SA-24, SI-2(7) into the Parts 11/15 closure tables before FedRAMP incorporates the deltas.</a:t>
+            </a:r>
+            <a:endParaRPr lang="en-US" sz="950" dirty="0"/>
+          </a:p>
+        </p:txBody>
+      </p:sp>
+      <p:sp>
+        <p:nvSpPr>
+          <p:cNvPr id="18" name="Shape 16"/>
+          <p:cNvSpPr/>
+          <p:nvPr/>
+        </p:nvSpPr>
+        <p:spPr>
+          <a:xfrm>
+            <a:off x="4690872" y="2862072"/>
+            <a:ext cx="4041648" cy="1481328"/>
+          </a:xfrm>
+          <a:prstGeom prst="roundRect">
+            <a:avLst>
+              <a:gd name="adj" fmla="val 4321"/>
+            </a:avLst>
+          </a:prstGeom>
+          <a:solidFill>
+            <a:srgbClr val="FFFFFF"/>
+          </a:solidFill>
+          <a:ln w="9525">
+            <a:solidFill>
+              <a:srgbClr val="C9D4E0"/>
+            </a:solidFill>
+            <a:prstDash val="solid"/>
+          </a:ln>
+          <a:effectLst>
+            <a:outerShdw sx="100000" sy="100000" kx="0" ky="0" algn="bl" rotWithShape="0" blurRad="88900" dist="25400" dir="2700000">
+              <a:srgbClr val="000000">
+                <a:alpha val="14000"/>
+              </a:srgbClr>
+            </a:outerShdw>
+          </a:effectLst>
+        </p:spPr>
+      </p:sp>
+      <p:sp>
+        <p:nvSpPr>
+          <p:cNvPr id="19" name="Shape 17"/>
+          <p:cNvSpPr/>
+          <p:nvPr/>
+        </p:nvSpPr>
+        <p:spPr>
+          <a:xfrm>
+            <a:off x="4818888" y="2990088"/>
+            <a:ext cx="3785616" cy="365760"/>
+          </a:xfrm>
+          <a:prstGeom prst="roundRect">
+            <a:avLst>
+              <a:gd name="adj" fmla="val 12500"/>
+            </a:avLst>
+          </a:prstGeom>
+          <a:solidFill>
+            <a:srgbClr val="F3F5F8"/>
+          </a:solidFill>
+          <a:ln/>
+        </p:spPr>
+      </p:sp>
+      <p:sp>
+        <p:nvSpPr>
+          <p:cNvPr id="20" name="Text 18"/>
+          <p:cNvSpPr/>
+          <p:nvPr/>
+        </p:nvSpPr>
+        <p:spPr>
+          <a:xfrm>
+            <a:off x="4946904" y="2990088"/>
+            <a:ext cx="3584448" cy="365760"/>
+          </a:xfrm>
+          <a:prstGeom prst="rect">
+            <a:avLst/>
+          </a:prstGeom>
+          <a:noFill/>
+          <a:ln/>
+        </p:spPr>
+        <p:txBody>
+          <a:bodyPr wrap="square" lIns="0" tIns="0" rIns="0" bIns="0" rtlCol="0" anchor="ctr"/>
+          <a:lstStyle/>
+          <a:p>
+            <a:pPr indent="0" marL="0">
+              <a:buNone/>
+            </a:pPr>
+            <a:r>
+              <a:rPr lang="en-US" sz="1150" b="1" dirty="0">
+                <a:solidFill>
+                  <a:srgbClr val="1F3A5F"/>
+                </a:solidFill>
+                <a:latin typeface="Arial" pitchFamily="34" charset="0"/>
+                <a:ea typeface="Arial" pitchFamily="34" charset="-122"/>
+                <a:cs typeface="Arial" pitchFamily="34" charset="-120"/>
+              </a:rPr>
+              <a:t>Check the crypto estate   </a:t>
+            </a:r>
+            <a:pPr indent="0" marL="0">
+              <a:buNone/>
+            </a:pPr>
+            <a:r>
+              <a:rPr lang="en-US" sz="900" b="1" dirty="0">
+                <a:solidFill>
+                  <a:srgbClr val="5B6B7C"/>
+                </a:solidFill>
+                <a:latin typeface="Arial" pitchFamily="34" charset="0"/>
+                <a:ea typeface="Arial" pitchFamily="34" charset="-122"/>
+                <a:cs typeface="Arial" pitchFamily="34" charset="-120"/>
+              </a:rPr>
+              <a:t>by Sep 21, 2026</a:t>
+            </a:r>
+            <a:endParaRPr lang="en-US" sz="1150" dirty="0"/>
+          </a:p>
+        </p:txBody>
+      </p:sp>
+      <p:sp>
+        <p:nvSpPr>
+          <p:cNvPr id="21" name="Text 19"/>
+          <p:cNvSpPr/>
+          <p:nvPr/>
+        </p:nvSpPr>
+        <p:spPr>
+          <a:xfrm>
+            <a:off x="4873752" y="3429000"/>
+            <a:ext cx="3675888" cy="804672"/>
+          </a:xfrm>
+          <a:prstGeom prst="rect">
+            <a:avLst/>
+          </a:prstGeom>
+          <a:noFill/>
+          <a:ln/>
+        </p:spPr>
+        <p:txBody>
+          <a:bodyPr wrap="square" lIns="0" tIns="0" rIns="0" bIns="0" rtlCol="0" anchor="ctr"/>
+          <a:lstStyle/>
+          <a:p>
+            <a:pPr indent="0" marL="0">
+              <a:buNone/>
+            </a:pPr>
+            <a:r>
+              <a:rPr lang="en-US" sz="950" dirty="0">
+                <a:solidFill>
+                  <a:srgbClr val="1E293B"/>
+                </a:solidFill>
+                <a:latin typeface="Arial" pitchFamily="34" charset="0"/>
+                <a:ea typeface="Arial" pitchFamily="34" charset="-122"/>
+                <a:cs typeface="Arial" pitchFamily="34" charset="-120"/>
+              </a:rPr>
+              <a:t>FIPS 140-2-only modules lose procurement standing Sep 21, 2026; M-23-02 crypto inventory feeds the 2030/2035 PQC arc.</a:t>
+            </a:r>
+            <a:endParaRPr lang="en-US" sz="950" dirty="0"/>
+          </a:p>
+        </p:txBody>
+      </p:sp>
+      <p:sp>
+        <p:nvSpPr>
+          <p:cNvPr id="22" name="Shape 20"/>
+          <p:cNvSpPr/>
+          <p:nvPr/>
+        </p:nvSpPr>
+        <p:spPr>
+          <a:xfrm>
+            <a:off x="502920" y="4434840"/>
+            <a:ext cx="8229600" cy="384048"/>
+          </a:xfrm>
+          <a:prstGeom prst="roundRect">
+            <a:avLst>
+              <a:gd name="adj" fmla="val 16667"/>
+            </a:avLst>
+          </a:prstGeom>
+          <a:solidFill>
+            <a:srgbClr val="EDF3F9"/>
+          </a:solidFill>
+          <a:ln w="9525">
+            <a:solidFill>
+              <a:srgbClr val="C9D4E0"/>
+            </a:solidFill>
+            <a:prstDash val="solid"/>
+          </a:ln>
+        </p:spPr>
+      </p:sp>
+      <p:sp>
+        <p:nvSpPr>
+          <p:cNvPr id="23" name="Text 21"/>
+          <p:cNvSpPr/>
+          <p:nvPr/>
+        </p:nvSpPr>
+        <p:spPr>
+          <a:xfrm>
+            <a:off x="731520" y="4434840"/>
+            <a:ext cx="7772400" cy="384048"/>
+          </a:xfrm>
+          <a:prstGeom prst="rect">
+            <a:avLst/>
+          </a:prstGeom>
+          <a:noFill/>
+          <a:ln/>
+        </p:spPr>
+        <p:txBody>
+          <a:bodyPr wrap="square" lIns="0" tIns="0" rIns="0" bIns="0" rtlCol="0" anchor="ctr"/>
+          <a:lstStyle/>
+          <a:p>
+            <a:pPr indent="0" marL="0">
+              <a:buNone/>
+            </a:pPr>
+            <a:r>
+              <a:rPr lang="en-US" sz="950" b="1" dirty="0">
+                <a:solidFill>
+                  <a:srgbClr val="1F3A5F"/>
+                </a:solidFill>
+                <a:latin typeface="Arial" pitchFamily="34" charset="0"/>
+                <a:ea typeface="Arial" pitchFamily="34" charset="-122"/>
+                <a:cs typeface="Arial" pitchFamily="34" charset="-120"/>
+              </a:rPr>
+              <a:t>The series is complete; the package is ready; the clocks are external now. The roadmap document carries the full sourced timeline and stays current — newest Date Code wins.</a:t>
             </a:r>
             <a:endParaRPr lang="en-US" sz="950" dirty="0"/>
           </a:p>
@@ -2127,7 +3153,7 @@
                 <a:ea typeface="Arial" pitchFamily="34" charset="-122"/>
                 <a:cs typeface="Arial" pitchFamily="34" charset="-120"/>
               </a:rPr>
-              <a:t>Federal AAN — ConMon Gap Roadmap · CSI Team Draft — Internal · FedRAMP Moderate · Date Code 2026-07-07 13:16 ET</a:t>
+              <a:t>Federal AAN — ConMon Gap Roadmap · CSI Team Draft — Internal · FedRAMP Moderate · Date Code 2026-07-07 15:28 ET</a:t>
             </a:r>
             <a:endParaRPr lang="en-US" sz="800" dirty="0"/>
           </a:p>
@@ -3106,7 +4132,7 @@
                 <a:ea typeface="Arial" pitchFamily="34" charset="-122"/>
                 <a:cs typeface="Arial" pitchFamily="34" charset="-120"/>
               </a:rPr>
-              <a:t>Federal AAN — ConMon Gap Roadmap · CSI Team Draft — Internal · FedRAMP Moderate · Date Code 2026-07-07 13:16 ET</a:t>
+              <a:t>Federal AAN — ConMon Gap Roadmap · CSI Team Draft — Internal · FedRAMP Moderate · Date Code 2026-07-07 15:28 ET</a:t>
             </a:r>
             <a:endParaRPr lang="en-US" sz="800" dirty="0"/>
           </a:p>
@@ -4085,7 +5111,7 @@
                 <a:ea typeface="Arial" pitchFamily="34" charset="-122"/>
                 <a:cs typeface="Arial" pitchFamily="34" charset="-120"/>
               </a:rPr>
-              <a:t>Federal AAN — ConMon Gap Roadmap · CSI Team Draft — Internal · FedRAMP Moderate · Date Code 2026-07-07 13:16 ET</a:t>
+              <a:t>Federal AAN — ConMon Gap Roadmap · CSI Team Draft — Internal · FedRAMP Moderate · Date Code 2026-07-07 15:28 ET</a:t>
             </a:r>
             <a:endParaRPr lang="en-US" sz="800" dirty="0"/>
           </a:p>
@@ -5064,7 +6090,7 @@
                 <a:ea typeface="Arial" pitchFamily="34" charset="-122"/>
                 <a:cs typeface="Arial" pitchFamily="34" charset="-120"/>
               </a:rPr>
-              <a:t>Federal AAN — ConMon Gap Roadmap · CSI Team Draft — Internal · FedRAMP Moderate · Date Code 2026-07-07 13:16 ET</a:t>
+              <a:t>Federal AAN — ConMon Gap Roadmap · CSI Team Draft — Internal · FedRAMP Moderate · Date Code 2026-07-07 15:28 ET</a:t>
             </a:r>
             <a:endParaRPr lang="en-US" sz="800" dirty="0"/>
           </a:p>
@@ -5771,7 +6797,7 @@
                 <a:ea typeface="Arial" pitchFamily="34" charset="-122"/>
                 <a:cs typeface="Arial" pitchFamily="34" charset="-120"/>
               </a:rPr>
-              <a:t>Federal AAN — ConMon Gap Roadmap · CSI Team Draft — Internal · FedRAMP Moderate · Date Code 2026-07-07 13:16 ET</a:t>
+              <a:t>Federal AAN — ConMon Gap Roadmap · CSI Team Draft — Internal · FedRAMP Moderate · Date Code 2026-07-07 15:28 ET</a:t>
             </a:r>
             <a:endParaRPr lang="en-US" sz="800" dirty="0"/>
           </a:p>
@@ -7995,7 +9021,7 @@
                 <a:ea typeface="Arial" pitchFamily="34" charset="-122"/>
                 <a:cs typeface="Arial" pitchFamily="34" charset="-120"/>
               </a:rPr>
-              <a:t>WHERE THE PROGRAM STANDS</a:t>
+              <a:t>THE REVIEW RESPONSE — CLARIFICATION</a:t>
             </a:r>
             <a:endParaRPr lang="en-US" sz="1100" dirty="0"/>
           </a:p>
@@ -8026,7 +9052,7 @@
               <a:buNone/>
             </a:pPr>
             <a:r>
-              <a:rPr lang="en-US" sz="2600" b="1" dirty="0">
+              <a:rPr lang="en-US" sz="2300" b="1" dirty="0">
                 <a:solidFill>
                   <a:srgbClr val="1F3A5F"/>
                 </a:solidFill>
@@ -8034,9 +9060,9 @@
                 <a:ea typeface="Arial" pitchFamily="34" charset="-122"/>
                 <a:cs typeface="Arial" pitchFamily="34" charset="-120"/>
               </a:rPr>
-              <a:t>Phases 0–6 complete; two phases remain — and both have dates</a:t>
-            </a:r>
-            <a:endParaRPr lang="en-US" sz="2600" dirty="0"/>
+              <a:t>Mechanism, not product: alternatives exist at every layer</a:t>
+            </a:r>
+            <a:endParaRPr lang="en-US" sz="2300" dirty="0"/>
           </a:p>
         </p:txBody>
       </p:sp>
@@ -8073,7 +9099,7 @@
                 <a:ea typeface="Arial" pitchFamily="34" charset="-122"/>
                 <a:cs typeface="Arial" pitchFamily="34" charset="-120"/>
               </a:rPr>
-              <a:t>Federal AAN — ConMon Gap Roadmap · CSI Team Draft — Internal · FedRAMP Moderate · Date Code 2026-07-07 13:16 ET</a:t>
+              <a:t>Federal AAN — ConMon Gap Roadmap · CSI Team Draft — Internal · FedRAMP Moderate · Date Code 2026-07-07 15:28 ET</a:t>
             </a:r>
             <a:endParaRPr lang="en-US" sz="800" dirty="0"/>
           </a:p>
@@ -8118,456 +9144,1493 @@
           </a:p>
         </p:txBody>
       </p:sp>
-      <p:sp>
-        <p:nvSpPr>
-          <p:cNvPr id="6" name="Shape 4"/>
-          <p:cNvSpPr/>
-          <p:nvPr/>
-        </p:nvSpPr>
-        <p:spPr>
-          <a:xfrm>
-            <a:off x="502920" y="1234440"/>
-            <a:ext cx="8229600" cy="566928"/>
+      <p:graphicFrame>
+        <p:nvGraphicFramePr>
+          <p:cNvPr id="8" name="Table 0"/>
+          <p:cNvGraphicFramePr>
+            <a:graphicFrameLocks noGrp="1"/>
+          </p:cNvGraphicFramePr>
+          <p:nvPr>
+            <p:extLst>
+              <p:ext uri="{D42A27DB-BD31-4B8C-83A1-F6EECF244321}">
+                <p14:modId xmlns:p14="http://schemas.microsoft.com/office/powerpoint/2010/main" val="1579011935"/>
+              </p:ext>
+            </p:extLst>
+          </p:nvPr>
+        </p:nvGraphicFramePr>
+        <p:xfrm>
+          <a:off x="502920" y="1243584"/>
+          <a:ext cx="8229600" cy="914400"/>
+        </p:xfrm>
+        <a:graphic>
+          <a:graphicData uri="http://schemas.openxmlformats.org/drawingml/2006/table">
+            <a:tbl>
+              <a:tblPr/>
+              <a:tblGrid>
+                <a:gridCol w="2743200"/>
+                <a:gridCol w="2011680"/>
+                <a:gridCol w="3474720"/>
+              </a:tblGrid>
+              <a:tr h="384048">
+                <a:tc>
+                  <a:txBody>
+                    <a:bodyPr/>
+                    <a:lstStyle/>
+                    <a:p>
+                      <a:pPr indent="0" marL="0">
+                        <a:buNone/>
+                      </a:pPr>
+                      <a:r>
+                        <a:rPr lang="en-US" sz="1000" b="1" dirty="0">
+                          <a:solidFill>
+                            <a:srgbClr val="FFFFFF"/>
+                          </a:solidFill>
+                          <a:latin typeface="Arial" pitchFamily="34" charset="0"/>
+                          <a:ea typeface="Arial" pitchFamily="34" charset="-122"/>
+                          <a:cs typeface="Arial" pitchFamily="34" charset="-120"/>
+                        </a:rPr>
+                        <a:t>Layer (mechanism)</a:t>
+                      </a:r>
+                      <a:endParaRPr lang="en-US" sz="1000" dirty="0">
+                        <a:latin typeface="Arial" charset="0"/>
+                        <a:ea typeface="Arial" charset="0"/>
+                        <a:cs typeface="Arial" charset="0"/>
+                      </a:endParaRPr>
+                    </a:p>
+                  </a:txBody>
+                  <a:tcPr marL="36576" marR="36576" marT="36576" marB="36576" anchor="ctr">
+                    <a:lnL w="9525" cap="flat" cmpd="sng" algn="ctr">
+                      <a:solidFill>
+                        <a:srgbClr val="C9D4E0"/>
+                      </a:solidFill>
+                      <a:prstDash val="solid"/>
+                      <a:round/>
+                      <a:headEnd type="none" w="med" len="med"/>
+                      <a:tailEnd type="none" w="med" len="med"/>
+                    </a:lnL>
+                    <a:lnR w="9525" cap="flat" cmpd="sng" algn="ctr">
+                      <a:solidFill>
+                        <a:srgbClr val="C9D4E0"/>
+                      </a:solidFill>
+                      <a:prstDash val="solid"/>
+                      <a:round/>
+                      <a:headEnd type="none" w="med" len="med"/>
+                      <a:tailEnd type="none" w="med" len="med"/>
+                    </a:lnR>
+                    <a:lnT w="9525" cap="flat" cmpd="sng" algn="ctr">
+                      <a:solidFill>
+                        <a:srgbClr val="C9D4E0"/>
+                      </a:solidFill>
+                      <a:prstDash val="solid"/>
+                      <a:round/>
+                      <a:headEnd type="none" w="med" len="med"/>
+                      <a:tailEnd type="none" w="med" len="med"/>
+                    </a:lnT>
+                    <a:lnB w="9525" cap="flat" cmpd="sng" algn="ctr">
+                      <a:solidFill>
+                        <a:srgbClr val="C9D4E0"/>
+                      </a:solidFill>
+                      <a:prstDash val="solid"/>
+                      <a:round/>
+                      <a:headEnd type="none" w="med" len="med"/>
+                      <a:tailEnd type="none" w="med" len="med"/>
+                    </a:lnB>
+                    <a:solidFill>
+                      <a:srgbClr val="1F3A5F"/>
+                    </a:solidFill>
+                  </a:tcPr>
+                </a:tc>
+                <a:tc>
+                  <a:txBody>
+                    <a:bodyPr/>
+                    <a:lstStyle/>
+                    <a:p>
+                      <a:pPr indent="0" marL="0">
+                        <a:buNone/>
+                      </a:pPr>
+                      <a:r>
+                        <a:rPr lang="en-US" sz="1000" b="1" dirty="0">
+                          <a:solidFill>
+                            <a:srgbClr val="FFFFFF"/>
+                          </a:solidFill>
+                          <a:latin typeface="Arial" pitchFamily="34" charset="0"/>
+                          <a:ea typeface="Arial" pitchFamily="34" charset="-122"/>
+                          <a:cs typeface="Arial" pitchFamily="34" charset="-120"/>
+                        </a:rPr>
+                        <a:t>Deployed example</a:t>
+                      </a:r>
+                      <a:endParaRPr lang="en-US" sz="1000" dirty="0">
+                        <a:latin typeface="Arial" charset="0"/>
+                        <a:ea typeface="Arial" charset="0"/>
+                        <a:cs typeface="Arial" charset="0"/>
+                      </a:endParaRPr>
+                    </a:p>
+                  </a:txBody>
+                  <a:tcPr marL="36576" marR="36576" marT="36576" marB="36576" anchor="ctr">
+                    <a:lnL w="9525" cap="flat" cmpd="sng" algn="ctr">
+                      <a:solidFill>
+                        <a:srgbClr val="C9D4E0"/>
+                      </a:solidFill>
+                      <a:prstDash val="solid"/>
+                      <a:round/>
+                      <a:headEnd type="none" w="med" len="med"/>
+                      <a:tailEnd type="none" w="med" len="med"/>
+                    </a:lnL>
+                    <a:lnR w="9525" cap="flat" cmpd="sng" algn="ctr">
+                      <a:solidFill>
+                        <a:srgbClr val="C9D4E0"/>
+                      </a:solidFill>
+                      <a:prstDash val="solid"/>
+                      <a:round/>
+                      <a:headEnd type="none" w="med" len="med"/>
+                      <a:tailEnd type="none" w="med" len="med"/>
+                    </a:lnR>
+                    <a:lnT w="9525" cap="flat" cmpd="sng" algn="ctr">
+                      <a:solidFill>
+                        <a:srgbClr val="C9D4E0"/>
+                      </a:solidFill>
+                      <a:prstDash val="solid"/>
+                      <a:round/>
+                      <a:headEnd type="none" w="med" len="med"/>
+                      <a:tailEnd type="none" w="med" len="med"/>
+                    </a:lnT>
+                    <a:lnB w="9525" cap="flat" cmpd="sng" algn="ctr">
+                      <a:solidFill>
+                        <a:srgbClr val="C9D4E0"/>
+                      </a:solidFill>
+                      <a:prstDash val="solid"/>
+                      <a:round/>
+                      <a:headEnd type="none" w="med" len="med"/>
+                      <a:tailEnd type="none" w="med" len="med"/>
+                    </a:lnB>
+                    <a:solidFill>
+                      <a:srgbClr val="1F3A5F"/>
+                    </a:solidFill>
+                  </a:tcPr>
+                </a:tc>
+                <a:tc>
+                  <a:txBody>
+                    <a:bodyPr/>
+                    <a:lstStyle/>
+                    <a:p>
+                      <a:pPr indent="0" marL="0">
+                        <a:buNone/>
+                      </a:pPr>
+                      <a:r>
+                        <a:rPr lang="en-US" sz="1000" b="1" dirty="0">
+                          <a:solidFill>
+                            <a:srgbClr val="FFFFFF"/>
+                          </a:solidFill>
+                          <a:latin typeface="Arial" pitchFamily="34" charset="0"/>
+                          <a:ea typeface="Arial" pitchFamily="34" charset="-122"/>
+                          <a:cs typeface="Arial" pitchFamily="34" charset="-120"/>
+                        </a:rPr>
+                        <a:t>FedRAMP-authorized alternatives</a:t>
+                      </a:r>
+                      <a:endParaRPr lang="en-US" sz="1000" dirty="0">
+                        <a:latin typeface="Arial" charset="0"/>
+                        <a:ea typeface="Arial" charset="0"/>
+                        <a:cs typeface="Arial" charset="0"/>
+                      </a:endParaRPr>
+                    </a:p>
+                  </a:txBody>
+                  <a:tcPr marL="36576" marR="36576" marT="36576" marB="36576" anchor="ctr">
+                    <a:lnL w="9525" cap="flat" cmpd="sng" algn="ctr">
+                      <a:solidFill>
+                        <a:srgbClr val="C9D4E0"/>
+                      </a:solidFill>
+                      <a:prstDash val="solid"/>
+                      <a:round/>
+                      <a:headEnd type="none" w="med" len="med"/>
+                      <a:tailEnd type="none" w="med" len="med"/>
+                    </a:lnL>
+                    <a:lnR w="9525" cap="flat" cmpd="sng" algn="ctr">
+                      <a:solidFill>
+                        <a:srgbClr val="C9D4E0"/>
+                      </a:solidFill>
+                      <a:prstDash val="solid"/>
+                      <a:round/>
+                      <a:headEnd type="none" w="med" len="med"/>
+                      <a:tailEnd type="none" w="med" len="med"/>
+                    </a:lnR>
+                    <a:lnT w="9525" cap="flat" cmpd="sng" algn="ctr">
+                      <a:solidFill>
+                        <a:srgbClr val="C9D4E0"/>
+                      </a:solidFill>
+                      <a:prstDash val="solid"/>
+                      <a:round/>
+                      <a:headEnd type="none" w="med" len="med"/>
+                      <a:tailEnd type="none" w="med" len="med"/>
+                    </a:lnT>
+                    <a:lnB w="9525" cap="flat" cmpd="sng" algn="ctr">
+                      <a:solidFill>
+                        <a:srgbClr val="C9D4E0"/>
+                      </a:solidFill>
+                      <a:prstDash val="solid"/>
+                      <a:round/>
+                      <a:headEnd type="none" w="med" len="med"/>
+                      <a:tailEnd type="none" w="med" len="med"/>
+                    </a:lnB>
+                    <a:solidFill>
+                      <a:srgbClr val="1F3A5F"/>
+                    </a:solidFill>
+                  </a:tcPr>
+                </a:tc>
+              </a:tr>
+              <a:tr h="384048">
+                <a:tc>
+                  <a:txBody>
+                    <a:bodyPr/>
+                    <a:lstStyle/>
+                    <a:p>
+                      <a:pPr indent="0" marL="0">
+                        <a:buNone/>
+                      </a:pPr>
+                      <a:r>
+                        <a:rPr lang="en-US" sz="850" b="1" dirty="0">
+                          <a:solidFill>
+                            <a:srgbClr val="1F3A5F"/>
+                          </a:solidFill>
+                          <a:latin typeface="Arial" pitchFamily="34" charset="0"/>
+                          <a:ea typeface="Arial" pitchFamily="34" charset="-122"/>
+                          <a:cs typeface="Arial" pitchFamily="34" charset="-120"/>
+                        </a:rPr>
+                        <a:t>Unified DDI (SC-20/21/22, CM-8)</a:t>
+                      </a:r>
+                      <a:endParaRPr lang="en-US" sz="850" dirty="0">
+                        <a:latin typeface="Arial" charset="0"/>
+                        <a:ea typeface="Arial" charset="0"/>
+                        <a:cs typeface="Arial" charset="0"/>
+                      </a:endParaRPr>
+                    </a:p>
+                  </a:txBody>
+                  <a:tcPr marL="36576" marR="36576" marT="36576" marB="36576" anchor="ctr">
+                    <a:lnL w="9525" cap="flat" cmpd="sng" algn="ctr">
+                      <a:solidFill>
+                        <a:srgbClr val="C9D4E0"/>
+                      </a:solidFill>
+                      <a:prstDash val="solid"/>
+                      <a:round/>
+                      <a:headEnd type="none" w="med" len="med"/>
+                      <a:tailEnd type="none" w="med" len="med"/>
+                    </a:lnL>
+                    <a:lnR w="9525" cap="flat" cmpd="sng" algn="ctr">
+                      <a:solidFill>
+                        <a:srgbClr val="C9D4E0"/>
+                      </a:solidFill>
+                      <a:prstDash val="solid"/>
+                      <a:round/>
+                      <a:headEnd type="none" w="med" len="med"/>
+                      <a:tailEnd type="none" w="med" len="med"/>
+                    </a:lnR>
+                    <a:lnT w="9525" cap="flat" cmpd="sng" algn="ctr">
+                      <a:solidFill>
+                        <a:srgbClr val="C9D4E0"/>
+                      </a:solidFill>
+                      <a:prstDash val="solid"/>
+                      <a:round/>
+                      <a:headEnd type="none" w="med" len="med"/>
+                      <a:tailEnd type="none" w="med" len="med"/>
+                    </a:lnT>
+                    <a:lnB w="9525" cap="flat" cmpd="sng" algn="ctr">
+                      <a:solidFill>
+                        <a:srgbClr val="C9D4E0"/>
+                      </a:solidFill>
+                      <a:prstDash val="solid"/>
+                      <a:round/>
+                      <a:headEnd type="none" w="med" len="med"/>
+                      <a:tailEnd type="none" w="med" len="med"/>
+                    </a:lnB>
+                    <a:solidFill>
+                      <a:srgbClr val="FFFFFF"/>
+                    </a:solidFill>
+                  </a:tcPr>
+                </a:tc>
+                <a:tc>
+                  <a:txBody>
+                    <a:bodyPr/>
+                    <a:lstStyle/>
+                    <a:p>
+                      <a:pPr indent="0" marL="0">
+                        <a:buNone/>
+                      </a:pPr>
+                      <a:r>
+                        <a:rPr lang="en-US" sz="850" dirty="0">
+                          <a:solidFill>
+                            <a:srgbClr val="1E293B"/>
+                          </a:solidFill>
+                          <a:latin typeface="Arial" pitchFamily="34" charset="0"/>
+                          <a:ea typeface="Arial" pitchFamily="34" charset="-122"/>
+                          <a:cs typeface="Arial" pitchFamily="34" charset="-120"/>
+                        </a:rPr>
+                        <a:t>InfoBlox</a:t>
+                      </a:r>
+                      <a:endParaRPr lang="en-US" sz="850" dirty="0">
+                        <a:latin typeface="Arial" charset="0"/>
+                        <a:ea typeface="Arial" charset="0"/>
+                        <a:cs typeface="Arial" charset="0"/>
+                      </a:endParaRPr>
+                    </a:p>
+                  </a:txBody>
+                  <a:tcPr marL="36576" marR="36576" marT="36576" marB="36576" anchor="ctr">
+                    <a:lnL w="9525" cap="flat" cmpd="sng" algn="ctr">
+                      <a:solidFill>
+                        <a:srgbClr val="C9D4E0"/>
+                      </a:solidFill>
+                      <a:prstDash val="solid"/>
+                      <a:round/>
+                      <a:headEnd type="none" w="med" len="med"/>
+                      <a:tailEnd type="none" w="med" len="med"/>
+                    </a:lnL>
+                    <a:lnR w="9525" cap="flat" cmpd="sng" algn="ctr">
+                      <a:solidFill>
+                        <a:srgbClr val="C9D4E0"/>
+                      </a:solidFill>
+                      <a:prstDash val="solid"/>
+                      <a:round/>
+                      <a:headEnd type="none" w="med" len="med"/>
+                      <a:tailEnd type="none" w="med" len="med"/>
+                    </a:lnR>
+                    <a:lnT w="9525" cap="flat" cmpd="sng" algn="ctr">
+                      <a:solidFill>
+                        <a:srgbClr val="C9D4E0"/>
+                      </a:solidFill>
+                      <a:prstDash val="solid"/>
+                      <a:round/>
+                      <a:headEnd type="none" w="med" len="med"/>
+                      <a:tailEnd type="none" w="med" len="med"/>
+                    </a:lnT>
+                    <a:lnB w="9525" cap="flat" cmpd="sng" algn="ctr">
+                      <a:solidFill>
+                        <a:srgbClr val="C9D4E0"/>
+                      </a:solidFill>
+                      <a:prstDash val="solid"/>
+                      <a:round/>
+                      <a:headEnd type="none" w="med" len="med"/>
+                      <a:tailEnd type="none" w="med" len="med"/>
+                    </a:lnB>
+                    <a:solidFill>
+                      <a:srgbClr val="FFFFFF"/>
+                    </a:solidFill>
+                  </a:tcPr>
+                </a:tc>
+                <a:tc>
+                  <a:txBody>
+                    <a:bodyPr/>
+                    <a:lstStyle/>
+                    <a:p>
+                      <a:pPr indent="0" marL="0">
+                        <a:buNone/>
+                      </a:pPr>
+                      <a:r>
+                        <a:rPr lang="en-US" sz="850" dirty="0">
+                          <a:solidFill>
+                            <a:srgbClr val="1E293B"/>
+                          </a:solidFill>
+                          <a:latin typeface="Arial" pitchFamily="34" charset="0"/>
+                          <a:ea typeface="Arial" pitchFamily="34" charset="-122"/>
+                          <a:cs typeface="Arial" pitchFamily="34" charset="-120"/>
+                        </a:rPr>
+                        <a:t>BlueCat; composite cloud-native path (with reconciliation cost)</a:t>
+                      </a:r>
+                      <a:endParaRPr lang="en-US" sz="850" dirty="0">
+                        <a:latin typeface="Arial" charset="0"/>
+                        <a:ea typeface="Arial" charset="0"/>
+                        <a:cs typeface="Arial" charset="0"/>
+                      </a:endParaRPr>
+                    </a:p>
+                  </a:txBody>
+                  <a:tcPr marL="36576" marR="36576" marT="36576" marB="36576" anchor="ctr">
+                    <a:lnL w="9525" cap="flat" cmpd="sng" algn="ctr">
+                      <a:solidFill>
+                        <a:srgbClr val="C9D4E0"/>
+                      </a:solidFill>
+                      <a:prstDash val="solid"/>
+                      <a:round/>
+                      <a:headEnd type="none" w="med" len="med"/>
+                      <a:tailEnd type="none" w="med" len="med"/>
+                    </a:lnL>
+                    <a:lnR w="9525" cap="flat" cmpd="sng" algn="ctr">
+                      <a:solidFill>
+                        <a:srgbClr val="C9D4E0"/>
+                      </a:solidFill>
+                      <a:prstDash val="solid"/>
+                      <a:round/>
+                      <a:headEnd type="none" w="med" len="med"/>
+                      <a:tailEnd type="none" w="med" len="med"/>
+                    </a:lnR>
+                    <a:lnT w="9525" cap="flat" cmpd="sng" algn="ctr">
+                      <a:solidFill>
+                        <a:srgbClr val="C9D4E0"/>
+                      </a:solidFill>
+                      <a:prstDash val="solid"/>
+                      <a:round/>
+                      <a:headEnd type="none" w="med" len="med"/>
+                      <a:tailEnd type="none" w="med" len="med"/>
+                    </a:lnT>
+                    <a:lnB w="9525" cap="flat" cmpd="sng" algn="ctr">
+                      <a:solidFill>
+                        <a:srgbClr val="C9D4E0"/>
+                      </a:solidFill>
+                      <a:prstDash val="solid"/>
+                      <a:round/>
+                      <a:headEnd type="none" w="med" len="med"/>
+                      <a:tailEnd type="none" w="med" len="med"/>
+                    </a:lnB>
+                    <a:solidFill>
+                      <a:srgbClr val="E6F5F2"/>
+                    </a:solidFill>
+                  </a:tcPr>
+                </a:tc>
+              </a:tr>
+              <a:tr h="384048">
+                <a:tc>
+                  <a:txBody>
+                    <a:bodyPr/>
+                    <a:lstStyle/>
+                    <a:p>
+                      <a:pPr indent="0" marL="0">
+                        <a:buNone/>
+                      </a:pPr>
+                      <a:r>
+                        <a:rPr lang="en-US" sz="850" b="1" dirty="0">
+                          <a:solidFill>
+                            <a:srgbClr val="1F3A5F"/>
+                          </a:solidFill>
+                          <a:latin typeface="Arial" pitchFamily="34" charset="0"/>
+                          <a:ea typeface="Arial" pitchFamily="34" charset="-122"/>
+                          <a:cs typeface="Arial" pitchFamily="34" charset="-120"/>
+                        </a:rPr>
+                        <a:t>NAC / RADIUS (IA-3)</a:t>
+                      </a:r>
+                      <a:endParaRPr lang="en-US" sz="850" dirty="0">
+                        <a:latin typeface="Arial" charset="0"/>
+                        <a:ea typeface="Arial" charset="0"/>
+                        <a:cs typeface="Arial" charset="0"/>
+                      </a:endParaRPr>
+                    </a:p>
+                  </a:txBody>
+                  <a:tcPr marL="36576" marR="36576" marT="36576" marB="36576" anchor="ctr">
+                    <a:lnL w="9525" cap="flat" cmpd="sng" algn="ctr">
+                      <a:solidFill>
+                        <a:srgbClr val="C9D4E0"/>
+                      </a:solidFill>
+                      <a:prstDash val="solid"/>
+                      <a:round/>
+                      <a:headEnd type="none" w="med" len="med"/>
+                      <a:tailEnd type="none" w="med" len="med"/>
+                    </a:lnL>
+                    <a:lnR w="9525" cap="flat" cmpd="sng" algn="ctr">
+                      <a:solidFill>
+                        <a:srgbClr val="C9D4E0"/>
+                      </a:solidFill>
+                      <a:prstDash val="solid"/>
+                      <a:round/>
+                      <a:headEnd type="none" w="med" len="med"/>
+                      <a:tailEnd type="none" w="med" len="med"/>
+                    </a:lnR>
+                    <a:lnT w="9525" cap="flat" cmpd="sng" algn="ctr">
+                      <a:solidFill>
+                        <a:srgbClr val="C9D4E0"/>
+                      </a:solidFill>
+                      <a:prstDash val="solid"/>
+                      <a:round/>
+                      <a:headEnd type="none" w="med" len="med"/>
+                      <a:tailEnd type="none" w="med" len="med"/>
+                    </a:lnT>
+                    <a:lnB w="9525" cap="flat" cmpd="sng" algn="ctr">
+                      <a:solidFill>
+                        <a:srgbClr val="C9D4E0"/>
+                      </a:solidFill>
+                      <a:prstDash val="solid"/>
+                      <a:round/>
+                      <a:headEnd type="none" w="med" len="med"/>
+                      <a:tailEnd type="none" w="med" len="med"/>
+                    </a:lnB>
+                    <a:solidFill>
+                      <a:srgbClr val="F3F5F8"/>
+                    </a:solidFill>
+                  </a:tcPr>
+                </a:tc>
+                <a:tc>
+                  <a:txBody>
+                    <a:bodyPr/>
+                    <a:lstStyle/>
+                    <a:p>
+                      <a:pPr indent="0" marL="0">
+                        <a:buNone/>
+                      </a:pPr>
+                      <a:r>
+                        <a:rPr lang="en-US" sz="850" dirty="0">
+                          <a:solidFill>
+                            <a:srgbClr val="1E293B"/>
+                          </a:solidFill>
+                          <a:latin typeface="Arial" pitchFamily="34" charset="0"/>
+                          <a:ea typeface="Arial" pitchFamily="34" charset="-122"/>
+                          <a:cs typeface="Arial" pitchFamily="34" charset="-120"/>
+                        </a:rPr>
+                        <a:t>Microsoft NPS</a:t>
+                      </a:r>
+                      <a:endParaRPr lang="en-US" sz="850" dirty="0">
+                        <a:latin typeface="Arial" charset="0"/>
+                        <a:ea typeface="Arial" charset="0"/>
+                        <a:cs typeface="Arial" charset="0"/>
+                      </a:endParaRPr>
+                    </a:p>
+                  </a:txBody>
+                  <a:tcPr marL="36576" marR="36576" marT="36576" marB="36576" anchor="ctr">
+                    <a:lnL w="9525" cap="flat" cmpd="sng" algn="ctr">
+                      <a:solidFill>
+                        <a:srgbClr val="C9D4E0"/>
+                      </a:solidFill>
+                      <a:prstDash val="solid"/>
+                      <a:round/>
+                      <a:headEnd type="none" w="med" len="med"/>
+                      <a:tailEnd type="none" w="med" len="med"/>
+                    </a:lnL>
+                    <a:lnR w="9525" cap="flat" cmpd="sng" algn="ctr">
+                      <a:solidFill>
+                        <a:srgbClr val="C9D4E0"/>
+                      </a:solidFill>
+                      <a:prstDash val="solid"/>
+                      <a:round/>
+                      <a:headEnd type="none" w="med" len="med"/>
+                      <a:tailEnd type="none" w="med" len="med"/>
+                    </a:lnR>
+                    <a:lnT w="9525" cap="flat" cmpd="sng" algn="ctr">
+                      <a:solidFill>
+                        <a:srgbClr val="C9D4E0"/>
+                      </a:solidFill>
+                      <a:prstDash val="solid"/>
+                      <a:round/>
+                      <a:headEnd type="none" w="med" len="med"/>
+                      <a:tailEnd type="none" w="med" len="med"/>
+                    </a:lnT>
+                    <a:lnB w="9525" cap="flat" cmpd="sng" algn="ctr">
+                      <a:solidFill>
+                        <a:srgbClr val="C9D4E0"/>
+                      </a:solidFill>
+                      <a:prstDash val="solid"/>
+                      <a:round/>
+                      <a:headEnd type="none" w="med" len="med"/>
+                      <a:tailEnd type="none" w="med" len="med"/>
+                    </a:lnB>
+                    <a:solidFill>
+                      <a:srgbClr val="F3F5F8"/>
+                    </a:solidFill>
+                  </a:tcPr>
+                </a:tc>
+                <a:tc>
+                  <a:txBody>
+                    <a:bodyPr/>
+                    <a:lstStyle/>
+                    <a:p>
+                      <a:pPr indent="0" marL="0">
+                        <a:buNone/>
+                      </a:pPr>
+                      <a:r>
+                        <a:rPr lang="en-US" sz="850" dirty="0">
+                          <a:solidFill>
+                            <a:srgbClr val="1E293B"/>
+                          </a:solidFill>
+                          <a:latin typeface="Arial" pitchFamily="34" charset="0"/>
+                          <a:ea typeface="Arial" pitchFamily="34" charset="-122"/>
+                          <a:cs typeface="Arial" pitchFamily="34" charset="-120"/>
+                        </a:rPr>
+                        <a:t>Cisco ISE; Aruba ClearPass; Forescout</a:t>
+                      </a:r>
+                      <a:endParaRPr lang="en-US" sz="850" dirty="0">
+                        <a:latin typeface="Arial" charset="0"/>
+                        <a:ea typeface="Arial" charset="0"/>
+                        <a:cs typeface="Arial" charset="0"/>
+                      </a:endParaRPr>
+                    </a:p>
+                  </a:txBody>
+                  <a:tcPr marL="36576" marR="36576" marT="36576" marB="36576" anchor="ctr">
+                    <a:lnL w="9525" cap="flat" cmpd="sng" algn="ctr">
+                      <a:solidFill>
+                        <a:srgbClr val="C9D4E0"/>
+                      </a:solidFill>
+                      <a:prstDash val="solid"/>
+                      <a:round/>
+                      <a:headEnd type="none" w="med" len="med"/>
+                      <a:tailEnd type="none" w="med" len="med"/>
+                    </a:lnL>
+                    <a:lnR w="9525" cap="flat" cmpd="sng" algn="ctr">
+                      <a:solidFill>
+                        <a:srgbClr val="C9D4E0"/>
+                      </a:solidFill>
+                      <a:prstDash val="solid"/>
+                      <a:round/>
+                      <a:headEnd type="none" w="med" len="med"/>
+                      <a:tailEnd type="none" w="med" len="med"/>
+                    </a:lnR>
+                    <a:lnT w="9525" cap="flat" cmpd="sng" algn="ctr">
+                      <a:solidFill>
+                        <a:srgbClr val="C9D4E0"/>
+                      </a:solidFill>
+                      <a:prstDash val="solid"/>
+                      <a:round/>
+                      <a:headEnd type="none" w="med" len="med"/>
+                      <a:tailEnd type="none" w="med" len="med"/>
+                    </a:lnT>
+                    <a:lnB w="9525" cap="flat" cmpd="sng" algn="ctr">
+                      <a:solidFill>
+                        <a:srgbClr val="C9D4E0"/>
+                      </a:solidFill>
+                      <a:prstDash val="solid"/>
+                      <a:round/>
+                      <a:headEnd type="none" w="med" len="med"/>
+                      <a:tailEnd type="none" w="med" len="med"/>
+                    </a:lnB>
+                    <a:solidFill>
+                      <a:srgbClr val="E6F5F2"/>
+                    </a:solidFill>
+                  </a:tcPr>
+                </a:tc>
+              </a:tr>
+              <a:tr h="384048">
+                <a:tc>
+                  <a:txBody>
+                    <a:bodyPr/>
+                    <a:lstStyle/>
+                    <a:p>
+                      <a:pPr indent="0" marL="0">
+                        <a:buNone/>
+                      </a:pPr>
+                      <a:r>
+                        <a:rPr lang="en-US" sz="850" b="1" dirty="0">
+                          <a:solidFill>
+                            <a:srgbClr val="1F3A5F"/>
+                          </a:solidFill>
+                          <a:latin typeface="Arial" pitchFamily="34" charset="0"/>
+                          <a:ea typeface="Arial" pitchFamily="34" charset="-122"/>
+                          <a:cs typeface="Arial" pitchFamily="34" charset="-120"/>
+                        </a:rPr>
+                        <a:t>SD-WAN (SC-8, AC-4)</a:t>
+                      </a:r>
+                      <a:endParaRPr lang="en-US" sz="850" dirty="0">
+                        <a:latin typeface="Arial" charset="0"/>
+                        <a:ea typeface="Arial" charset="0"/>
+                        <a:cs typeface="Arial" charset="0"/>
+                      </a:endParaRPr>
+                    </a:p>
+                  </a:txBody>
+                  <a:tcPr marL="36576" marR="36576" marT="36576" marB="36576" anchor="ctr">
+                    <a:lnL w="9525" cap="flat" cmpd="sng" algn="ctr">
+                      <a:solidFill>
+                        <a:srgbClr val="C9D4E0"/>
+                      </a:solidFill>
+                      <a:prstDash val="solid"/>
+                      <a:round/>
+                      <a:headEnd type="none" w="med" len="med"/>
+                      <a:tailEnd type="none" w="med" len="med"/>
+                    </a:lnL>
+                    <a:lnR w="9525" cap="flat" cmpd="sng" algn="ctr">
+                      <a:solidFill>
+                        <a:srgbClr val="C9D4E0"/>
+                      </a:solidFill>
+                      <a:prstDash val="solid"/>
+                      <a:round/>
+                      <a:headEnd type="none" w="med" len="med"/>
+                      <a:tailEnd type="none" w="med" len="med"/>
+                    </a:lnR>
+                    <a:lnT w="9525" cap="flat" cmpd="sng" algn="ctr">
+                      <a:solidFill>
+                        <a:srgbClr val="C9D4E0"/>
+                      </a:solidFill>
+                      <a:prstDash val="solid"/>
+                      <a:round/>
+                      <a:headEnd type="none" w="med" len="med"/>
+                      <a:tailEnd type="none" w="med" len="med"/>
+                    </a:lnT>
+                    <a:lnB w="9525" cap="flat" cmpd="sng" algn="ctr">
+                      <a:solidFill>
+                        <a:srgbClr val="C9D4E0"/>
+                      </a:solidFill>
+                      <a:prstDash val="solid"/>
+                      <a:round/>
+                      <a:headEnd type="none" w="med" len="med"/>
+                      <a:tailEnd type="none" w="med" len="med"/>
+                    </a:lnB>
+                    <a:solidFill>
+                      <a:srgbClr val="FFFFFF"/>
+                    </a:solidFill>
+                  </a:tcPr>
+                </a:tc>
+                <a:tc>
+                  <a:txBody>
+                    <a:bodyPr/>
+                    <a:lstStyle/>
+                    <a:p>
+                      <a:pPr indent="0" marL="0">
+                        <a:buNone/>
+                      </a:pPr>
+                      <a:r>
+                        <a:rPr lang="en-US" sz="850" dirty="0">
+                          <a:solidFill>
+                            <a:srgbClr val="1E293B"/>
+                          </a:solidFill>
+                          <a:latin typeface="Arial" pitchFamily="34" charset="0"/>
+                          <a:ea typeface="Arial" pitchFamily="34" charset="-122"/>
+                          <a:cs typeface="Arial" pitchFamily="34" charset="-120"/>
+                        </a:rPr>
+                        <a:t>Cisco Catalyst</a:t>
+                      </a:r>
+                      <a:endParaRPr lang="en-US" sz="850" dirty="0">
+                        <a:latin typeface="Arial" charset="0"/>
+                        <a:ea typeface="Arial" charset="0"/>
+                        <a:cs typeface="Arial" charset="0"/>
+                      </a:endParaRPr>
+                    </a:p>
+                  </a:txBody>
+                  <a:tcPr marL="36576" marR="36576" marT="36576" marB="36576" anchor="ctr">
+                    <a:lnL w="9525" cap="flat" cmpd="sng" algn="ctr">
+                      <a:solidFill>
+                        <a:srgbClr val="C9D4E0"/>
+                      </a:solidFill>
+                      <a:prstDash val="solid"/>
+                      <a:round/>
+                      <a:headEnd type="none" w="med" len="med"/>
+                      <a:tailEnd type="none" w="med" len="med"/>
+                    </a:lnL>
+                    <a:lnR w="9525" cap="flat" cmpd="sng" algn="ctr">
+                      <a:solidFill>
+                        <a:srgbClr val="C9D4E0"/>
+                      </a:solidFill>
+                      <a:prstDash val="solid"/>
+                      <a:round/>
+                      <a:headEnd type="none" w="med" len="med"/>
+                      <a:tailEnd type="none" w="med" len="med"/>
+                    </a:lnR>
+                    <a:lnT w="9525" cap="flat" cmpd="sng" algn="ctr">
+                      <a:solidFill>
+                        <a:srgbClr val="C9D4E0"/>
+                      </a:solidFill>
+                      <a:prstDash val="solid"/>
+                      <a:round/>
+                      <a:headEnd type="none" w="med" len="med"/>
+                      <a:tailEnd type="none" w="med" len="med"/>
+                    </a:lnT>
+                    <a:lnB w="9525" cap="flat" cmpd="sng" algn="ctr">
+                      <a:solidFill>
+                        <a:srgbClr val="C9D4E0"/>
+                      </a:solidFill>
+                      <a:prstDash val="solid"/>
+                      <a:round/>
+                      <a:headEnd type="none" w="med" len="med"/>
+                      <a:tailEnd type="none" w="med" len="med"/>
+                    </a:lnB>
+                    <a:solidFill>
+                      <a:srgbClr val="FFFFFF"/>
+                    </a:solidFill>
+                  </a:tcPr>
+                </a:tc>
+                <a:tc>
+                  <a:txBody>
+                    <a:bodyPr/>
+                    <a:lstStyle/>
+                    <a:p>
+                      <a:pPr indent="0" marL="0">
+                        <a:buNone/>
+                      </a:pPr>
+                      <a:r>
+                        <a:rPr lang="en-US" sz="850" dirty="0">
+                          <a:solidFill>
+                            <a:srgbClr val="1E293B"/>
+                          </a:solidFill>
+                          <a:latin typeface="Arial" pitchFamily="34" charset="0"/>
+                          <a:ea typeface="Arial" pitchFamily="34" charset="-122"/>
+                          <a:cs typeface="Arial" pitchFamily="34" charset="-120"/>
+                        </a:rPr>
+                        <a:t>Prisma SD-WAN; Fortinet; Versa; VeloCloud</a:t>
+                      </a:r>
+                      <a:endParaRPr lang="en-US" sz="850" dirty="0">
+                        <a:latin typeface="Arial" charset="0"/>
+                        <a:ea typeface="Arial" charset="0"/>
+                        <a:cs typeface="Arial" charset="0"/>
+                      </a:endParaRPr>
+                    </a:p>
+                  </a:txBody>
+                  <a:tcPr marL="36576" marR="36576" marT="36576" marB="36576" anchor="ctr">
+                    <a:lnL w="9525" cap="flat" cmpd="sng" algn="ctr">
+                      <a:solidFill>
+                        <a:srgbClr val="C9D4E0"/>
+                      </a:solidFill>
+                      <a:prstDash val="solid"/>
+                      <a:round/>
+                      <a:headEnd type="none" w="med" len="med"/>
+                      <a:tailEnd type="none" w="med" len="med"/>
+                    </a:lnL>
+                    <a:lnR w="9525" cap="flat" cmpd="sng" algn="ctr">
+                      <a:solidFill>
+                        <a:srgbClr val="C9D4E0"/>
+                      </a:solidFill>
+                      <a:prstDash val="solid"/>
+                      <a:round/>
+                      <a:headEnd type="none" w="med" len="med"/>
+                      <a:tailEnd type="none" w="med" len="med"/>
+                    </a:lnR>
+                    <a:lnT w="9525" cap="flat" cmpd="sng" algn="ctr">
+                      <a:solidFill>
+                        <a:srgbClr val="C9D4E0"/>
+                      </a:solidFill>
+                      <a:prstDash val="solid"/>
+                      <a:round/>
+                      <a:headEnd type="none" w="med" len="med"/>
+                      <a:tailEnd type="none" w="med" len="med"/>
+                    </a:lnT>
+                    <a:lnB w="9525" cap="flat" cmpd="sng" algn="ctr">
+                      <a:solidFill>
+                        <a:srgbClr val="C9D4E0"/>
+                      </a:solidFill>
+                      <a:prstDash val="solid"/>
+                      <a:round/>
+                      <a:headEnd type="none" w="med" len="med"/>
+                      <a:tailEnd type="none" w="med" len="med"/>
+                    </a:lnB>
+                    <a:solidFill>
+                      <a:srgbClr val="E6F5F2"/>
+                    </a:solidFill>
+                  </a:tcPr>
+                </a:tc>
+              </a:tr>
+              <a:tr h="384048">
+                <a:tc>
+                  <a:txBody>
+                    <a:bodyPr/>
+                    <a:lstStyle/>
+                    <a:p>
+                      <a:pPr indent="0" marL="0">
+                        <a:buNone/>
+                      </a:pPr>
+                      <a:r>
+                        <a:rPr lang="en-US" sz="850" b="1" dirty="0">
+                          <a:solidFill>
+                            <a:srgbClr val="1F3A5F"/>
+                          </a:solidFill>
+                          <a:latin typeface="Arial" pitchFamily="34" charset="0"/>
+                          <a:ea typeface="Arial" pitchFamily="34" charset="-122"/>
+                          <a:cs typeface="Arial" pitchFamily="34" charset="-120"/>
+                        </a:rPr>
+                        <a:t>SASE / TIC 3.0 PEP (SC-7, SI-3)</a:t>
+                      </a:r>
+                      <a:endParaRPr lang="en-US" sz="850" dirty="0">
+                        <a:latin typeface="Arial" charset="0"/>
+                        <a:ea typeface="Arial" charset="0"/>
+                        <a:cs typeface="Arial" charset="0"/>
+                      </a:endParaRPr>
+                    </a:p>
+                  </a:txBody>
+                  <a:tcPr marL="36576" marR="36576" marT="36576" marB="36576" anchor="ctr">
+                    <a:lnL w="9525" cap="flat" cmpd="sng" algn="ctr">
+                      <a:solidFill>
+                        <a:srgbClr val="C9D4E0"/>
+                      </a:solidFill>
+                      <a:prstDash val="solid"/>
+                      <a:round/>
+                      <a:headEnd type="none" w="med" len="med"/>
+                      <a:tailEnd type="none" w="med" len="med"/>
+                    </a:lnL>
+                    <a:lnR w="9525" cap="flat" cmpd="sng" algn="ctr">
+                      <a:solidFill>
+                        <a:srgbClr val="C9D4E0"/>
+                      </a:solidFill>
+                      <a:prstDash val="solid"/>
+                      <a:round/>
+                      <a:headEnd type="none" w="med" len="med"/>
+                      <a:tailEnd type="none" w="med" len="med"/>
+                    </a:lnR>
+                    <a:lnT w="9525" cap="flat" cmpd="sng" algn="ctr">
+                      <a:solidFill>
+                        <a:srgbClr val="C9D4E0"/>
+                      </a:solidFill>
+                      <a:prstDash val="solid"/>
+                      <a:round/>
+                      <a:headEnd type="none" w="med" len="med"/>
+                      <a:tailEnd type="none" w="med" len="med"/>
+                    </a:lnT>
+                    <a:lnB w="9525" cap="flat" cmpd="sng" algn="ctr">
+                      <a:solidFill>
+                        <a:srgbClr val="C9D4E0"/>
+                      </a:solidFill>
+                      <a:prstDash val="solid"/>
+                      <a:round/>
+                      <a:headEnd type="none" w="med" len="med"/>
+                      <a:tailEnd type="none" w="med" len="med"/>
+                    </a:lnB>
+                    <a:solidFill>
+                      <a:srgbClr val="F3F5F8"/>
+                    </a:solidFill>
+                  </a:tcPr>
+                </a:tc>
+                <a:tc>
+                  <a:txBody>
+                    <a:bodyPr/>
+                    <a:lstStyle/>
+                    <a:p>
+                      <a:pPr indent="0" marL="0">
+                        <a:buNone/>
+                      </a:pPr>
+                      <a:r>
+                        <a:rPr lang="en-US" sz="850" dirty="0">
+                          <a:solidFill>
+                            <a:srgbClr val="1E293B"/>
+                          </a:solidFill>
+                          <a:latin typeface="Arial" pitchFamily="34" charset="0"/>
+                          <a:ea typeface="Arial" pitchFamily="34" charset="-122"/>
+                          <a:cs typeface="Arial" pitchFamily="34" charset="-120"/>
+                        </a:rPr>
+                        <a:t>Cisco Umbrella</a:t>
+                      </a:r>
+                      <a:endParaRPr lang="en-US" sz="850" dirty="0">
+                        <a:latin typeface="Arial" charset="0"/>
+                        <a:ea typeface="Arial" charset="0"/>
+                        <a:cs typeface="Arial" charset="0"/>
+                      </a:endParaRPr>
+                    </a:p>
+                  </a:txBody>
+                  <a:tcPr marL="36576" marR="36576" marT="36576" marB="36576" anchor="ctr">
+                    <a:lnL w="9525" cap="flat" cmpd="sng" algn="ctr">
+                      <a:solidFill>
+                        <a:srgbClr val="C9D4E0"/>
+                      </a:solidFill>
+                      <a:prstDash val="solid"/>
+                      <a:round/>
+                      <a:headEnd type="none" w="med" len="med"/>
+                      <a:tailEnd type="none" w="med" len="med"/>
+                    </a:lnL>
+                    <a:lnR w="9525" cap="flat" cmpd="sng" algn="ctr">
+                      <a:solidFill>
+                        <a:srgbClr val="C9D4E0"/>
+                      </a:solidFill>
+                      <a:prstDash val="solid"/>
+                      <a:round/>
+                      <a:headEnd type="none" w="med" len="med"/>
+                      <a:tailEnd type="none" w="med" len="med"/>
+                    </a:lnR>
+                    <a:lnT w="9525" cap="flat" cmpd="sng" algn="ctr">
+                      <a:solidFill>
+                        <a:srgbClr val="C9D4E0"/>
+                      </a:solidFill>
+                      <a:prstDash val="solid"/>
+                      <a:round/>
+                      <a:headEnd type="none" w="med" len="med"/>
+                      <a:tailEnd type="none" w="med" len="med"/>
+                    </a:lnT>
+                    <a:lnB w="9525" cap="flat" cmpd="sng" algn="ctr">
+                      <a:solidFill>
+                        <a:srgbClr val="C9D4E0"/>
+                      </a:solidFill>
+                      <a:prstDash val="solid"/>
+                      <a:round/>
+                      <a:headEnd type="none" w="med" len="med"/>
+                      <a:tailEnd type="none" w="med" len="med"/>
+                    </a:lnB>
+                    <a:solidFill>
+                      <a:srgbClr val="F3F5F8"/>
+                    </a:solidFill>
+                  </a:tcPr>
+                </a:tc>
+                <a:tc>
+                  <a:txBody>
+                    <a:bodyPr/>
+                    <a:lstStyle/>
+                    <a:p>
+                      <a:pPr indent="0" marL="0">
+                        <a:buNone/>
+                      </a:pPr>
+                      <a:r>
+                        <a:rPr lang="en-US" sz="850" dirty="0">
+                          <a:solidFill>
+                            <a:srgbClr val="1E293B"/>
+                          </a:solidFill>
+                          <a:latin typeface="Arial" pitchFamily="34" charset="0"/>
+                          <a:ea typeface="Arial" pitchFamily="34" charset="-122"/>
+                          <a:cs typeface="Arial" pitchFamily="34" charset="-120"/>
+                        </a:rPr>
+                        <a:t>Zscaler; Netskope GovCloud; Prisma Access</a:t>
+                      </a:r>
+                      <a:endParaRPr lang="en-US" sz="850" dirty="0">
+                        <a:latin typeface="Arial" charset="0"/>
+                        <a:ea typeface="Arial" charset="0"/>
+                        <a:cs typeface="Arial" charset="0"/>
+                      </a:endParaRPr>
+                    </a:p>
+                  </a:txBody>
+                  <a:tcPr marL="36576" marR="36576" marT="36576" marB="36576" anchor="ctr">
+                    <a:lnL w="9525" cap="flat" cmpd="sng" algn="ctr">
+                      <a:solidFill>
+                        <a:srgbClr val="C9D4E0"/>
+                      </a:solidFill>
+                      <a:prstDash val="solid"/>
+                      <a:round/>
+                      <a:headEnd type="none" w="med" len="med"/>
+                      <a:tailEnd type="none" w="med" len="med"/>
+                    </a:lnL>
+                    <a:lnR w="9525" cap="flat" cmpd="sng" algn="ctr">
+                      <a:solidFill>
+                        <a:srgbClr val="C9D4E0"/>
+                      </a:solidFill>
+                      <a:prstDash val="solid"/>
+                      <a:round/>
+                      <a:headEnd type="none" w="med" len="med"/>
+                      <a:tailEnd type="none" w="med" len="med"/>
+                    </a:lnR>
+                    <a:lnT w="9525" cap="flat" cmpd="sng" algn="ctr">
+                      <a:solidFill>
+                        <a:srgbClr val="C9D4E0"/>
+                      </a:solidFill>
+                      <a:prstDash val="solid"/>
+                      <a:round/>
+                      <a:headEnd type="none" w="med" len="med"/>
+                      <a:tailEnd type="none" w="med" len="med"/>
+                    </a:lnT>
+                    <a:lnB w="9525" cap="flat" cmpd="sng" algn="ctr">
+                      <a:solidFill>
+                        <a:srgbClr val="C9D4E0"/>
+                      </a:solidFill>
+                      <a:prstDash val="solid"/>
+                      <a:round/>
+                      <a:headEnd type="none" w="med" len="med"/>
+                      <a:tailEnd type="none" w="med" len="med"/>
+                    </a:lnB>
+                    <a:solidFill>
+                      <a:srgbClr val="E6F5F2"/>
+                    </a:solidFill>
+                  </a:tcPr>
+                </a:tc>
+              </a:tr>
+              <a:tr h="384048">
+                <a:tc>
+                  <a:txBody>
+                    <a:bodyPr/>
+                    <a:lstStyle/>
+                    <a:p>
+                      <a:pPr indent="0" marL="0">
+                        <a:buNone/>
+                      </a:pPr>
+                      <a:r>
+                        <a:rPr lang="en-US" sz="850" b="1" dirty="0">
+                          <a:solidFill>
+                            <a:srgbClr val="1F3A5F"/>
+                          </a:solidFill>
+                          <a:latin typeface="Arial" pitchFamily="34" charset="0"/>
+                          <a:ea typeface="Arial" pitchFamily="34" charset="-122"/>
+                          <a:cs typeface="Arial" pitchFamily="34" charset="-120"/>
+                        </a:rPr>
+                        <a:t>HR system of record (AC-2, PS-4/5)</a:t>
+                      </a:r>
+                      <a:endParaRPr lang="en-US" sz="850" dirty="0">
+                        <a:latin typeface="Arial" charset="0"/>
+                        <a:ea typeface="Arial" charset="0"/>
+                        <a:cs typeface="Arial" charset="0"/>
+                      </a:endParaRPr>
+                    </a:p>
+                  </a:txBody>
+                  <a:tcPr marL="36576" marR="36576" marT="36576" marB="36576" anchor="ctr">
+                    <a:lnL w="9525" cap="flat" cmpd="sng" algn="ctr">
+                      <a:solidFill>
+                        <a:srgbClr val="C9D4E0"/>
+                      </a:solidFill>
+                      <a:prstDash val="solid"/>
+                      <a:round/>
+                      <a:headEnd type="none" w="med" len="med"/>
+                      <a:tailEnd type="none" w="med" len="med"/>
+                    </a:lnL>
+                    <a:lnR w="9525" cap="flat" cmpd="sng" algn="ctr">
+                      <a:solidFill>
+                        <a:srgbClr val="C9D4E0"/>
+                      </a:solidFill>
+                      <a:prstDash val="solid"/>
+                      <a:round/>
+                      <a:headEnd type="none" w="med" len="med"/>
+                      <a:tailEnd type="none" w="med" len="med"/>
+                    </a:lnR>
+                    <a:lnT w="9525" cap="flat" cmpd="sng" algn="ctr">
+                      <a:solidFill>
+                        <a:srgbClr val="C9D4E0"/>
+                      </a:solidFill>
+                      <a:prstDash val="solid"/>
+                      <a:round/>
+                      <a:headEnd type="none" w="med" len="med"/>
+                      <a:tailEnd type="none" w="med" len="med"/>
+                    </a:lnT>
+                    <a:lnB w="9525" cap="flat" cmpd="sng" algn="ctr">
+                      <a:solidFill>
+                        <a:srgbClr val="C9D4E0"/>
+                      </a:solidFill>
+                      <a:prstDash val="solid"/>
+                      <a:round/>
+                      <a:headEnd type="none" w="med" len="med"/>
+                      <a:tailEnd type="none" w="med" len="med"/>
+                    </a:lnB>
+                    <a:solidFill>
+                      <a:srgbClr val="FFFFFF"/>
+                    </a:solidFill>
+                  </a:tcPr>
+                </a:tc>
+                <a:tc>
+                  <a:txBody>
+                    <a:bodyPr/>
+                    <a:lstStyle/>
+                    <a:p>
+                      <a:pPr indent="0" marL="0">
+                        <a:buNone/>
+                      </a:pPr>
+                      <a:r>
+                        <a:rPr lang="en-US" sz="850" dirty="0">
+                          <a:solidFill>
+                            <a:srgbClr val="1E293B"/>
+                          </a:solidFill>
+                          <a:latin typeface="Arial" pitchFamily="34" charset="0"/>
+                          <a:ea typeface="Arial" pitchFamily="34" charset="-122"/>
+                          <a:cs typeface="Arial" pitchFamily="34" charset="-120"/>
+                        </a:rPr>
+                        <a:t>Oracle HCM Cloud</a:t>
+                      </a:r>
+                      <a:endParaRPr lang="en-US" sz="850" dirty="0">
+                        <a:latin typeface="Arial" charset="0"/>
+                        <a:ea typeface="Arial" charset="0"/>
+                        <a:cs typeface="Arial" charset="0"/>
+                      </a:endParaRPr>
+                    </a:p>
+                  </a:txBody>
+                  <a:tcPr marL="36576" marR="36576" marT="36576" marB="36576" anchor="ctr">
+                    <a:lnL w="9525" cap="flat" cmpd="sng" algn="ctr">
+                      <a:solidFill>
+                        <a:srgbClr val="C9D4E0"/>
+                      </a:solidFill>
+                      <a:prstDash val="solid"/>
+                      <a:round/>
+                      <a:headEnd type="none" w="med" len="med"/>
+                      <a:tailEnd type="none" w="med" len="med"/>
+                    </a:lnL>
+                    <a:lnR w="9525" cap="flat" cmpd="sng" algn="ctr">
+                      <a:solidFill>
+                        <a:srgbClr val="C9D4E0"/>
+                      </a:solidFill>
+                      <a:prstDash val="solid"/>
+                      <a:round/>
+                      <a:headEnd type="none" w="med" len="med"/>
+                      <a:tailEnd type="none" w="med" len="med"/>
+                    </a:lnR>
+                    <a:lnT w="9525" cap="flat" cmpd="sng" algn="ctr">
+                      <a:solidFill>
+                        <a:srgbClr val="C9D4E0"/>
+                      </a:solidFill>
+                      <a:prstDash val="solid"/>
+                      <a:round/>
+                      <a:headEnd type="none" w="med" len="med"/>
+                      <a:tailEnd type="none" w="med" len="med"/>
+                    </a:lnT>
+                    <a:lnB w="9525" cap="flat" cmpd="sng" algn="ctr">
+                      <a:solidFill>
+                        <a:srgbClr val="C9D4E0"/>
+                      </a:solidFill>
+                      <a:prstDash val="solid"/>
+                      <a:round/>
+                      <a:headEnd type="none" w="med" len="med"/>
+                      <a:tailEnd type="none" w="med" len="med"/>
+                    </a:lnB>
+                    <a:solidFill>
+                      <a:srgbClr val="FFFFFF"/>
+                    </a:solidFill>
+                  </a:tcPr>
+                </a:tc>
+                <a:tc>
+                  <a:txBody>
+                    <a:bodyPr/>
+                    <a:lstStyle/>
+                    <a:p>
+                      <a:pPr indent="0" marL="0">
+                        <a:buNone/>
+                      </a:pPr>
+                      <a:r>
+                        <a:rPr lang="en-US" sz="850" dirty="0">
+                          <a:solidFill>
+                            <a:srgbClr val="1E293B"/>
+                          </a:solidFill>
+                          <a:latin typeface="Arial" pitchFamily="34" charset="0"/>
+                          <a:ea typeface="Arial" pitchFamily="34" charset="-122"/>
+                          <a:cs typeface="Arial" pitchFamily="34" charset="-120"/>
+                        </a:rPr>
+                        <a:t>Workday Gov; SuccessFactors — adapter-only change by design</a:t>
+                      </a:r>
+                      <a:endParaRPr lang="en-US" sz="850" dirty="0">
+                        <a:latin typeface="Arial" charset="0"/>
+                        <a:ea typeface="Arial" charset="0"/>
+                        <a:cs typeface="Arial" charset="0"/>
+                      </a:endParaRPr>
+                    </a:p>
+                  </a:txBody>
+                  <a:tcPr marL="36576" marR="36576" marT="36576" marB="36576" anchor="ctr">
+                    <a:lnL w="9525" cap="flat" cmpd="sng" algn="ctr">
+                      <a:solidFill>
+                        <a:srgbClr val="C9D4E0"/>
+                      </a:solidFill>
+                      <a:prstDash val="solid"/>
+                      <a:round/>
+                      <a:headEnd type="none" w="med" len="med"/>
+                      <a:tailEnd type="none" w="med" len="med"/>
+                    </a:lnL>
+                    <a:lnR w="9525" cap="flat" cmpd="sng" algn="ctr">
+                      <a:solidFill>
+                        <a:srgbClr val="C9D4E0"/>
+                      </a:solidFill>
+                      <a:prstDash val="solid"/>
+                      <a:round/>
+                      <a:headEnd type="none" w="med" len="med"/>
+                      <a:tailEnd type="none" w="med" len="med"/>
+                    </a:lnR>
+                    <a:lnT w="9525" cap="flat" cmpd="sng" algn="ctr">
+                      <a:solidFill>
+                        <a:srgbClr val="C9D4E0"/>
+                      </a:solidFill>
+                      <a:prstDash val="solid"/>
+                      <a:round/>
+                      <a:headEnd type="none" w="med" len="med"/>
+                      <a:tailEnd type="none" w="med" len="med"/>
+                    </a:lnT>
+                    <a:lnB w="9525" cap="flat" cmpd="sng" algn="ctr">
+                      <a:solidFill>
+                        <a:srgbClr val="C9D4E0"/>
+                      </a:solidFill>
+                      <a:prstDash val="solid"/>
+                      <a:round/>
+                      <a:headEnd type="none" w="med" len="med"/>
+                      <a:tailEnd type="none" w="med" len="med"/>
+                    </a:lnB>
+                    <a:solidFill>
+                      <a:srgbClr val="E6F5F2"/>
+                    </a:solidFill>
+                  </a:tcPr>
+                </a:tc>
+              </a:tr>
+              <a:tr h="384048">
+                <a:tc>
+                  <a:txBody>
+                    <a:bodyPr/>
+                    <a:lstStyle/>
+                    <a:p>
+                      <a:pPr indent="0" marL="0">
+                        <a:buNone/>
+                      </a:pPr>
+                      <a:r>
+                        <a:rPr lang="en-US" sz="850" b="1" dirty="0">
+                          <a:solidFill>
+                            <a:srgbClr val="1F3A5F"/>
+                          </a:solidFill>
+                          <a:latin typeface="Arial" pitchFamily="34" charset="0"/>
+                          <a:ea typeface="Arial" pitchFamily="34" charset="-122"/>
+                          <a:cs typeface="Arial" pitchFamily="34" charset="-120"/>
+                        </a:rPr>
+                        <a:t>SIEM / evidence (AU-6, SI-4)</a:t>
+                      </a:r>
+                      <a:endParaRPr lang="en-US" sz="850" dirty="0">
+                        <a:latin typeface="Arial" charset="0"/>
+                        <a:ea typeface="Arial" charset="0"/>
+                        <a:cs typeface="Arial" charset="0"/>
+                      </a:endParaRPr>
+                    </a:p>
+                  </a:txBody>
+                  <a:tcPr marL="36576" marR="36576" marT="36576" marB="36576" anchor="ctr">
+                    <a:lnL w="9525" cap="flat" cmpd="sng" algn="ctr">
+                      <a:solidFill>
+                        <a:srgbClr val="C9D4E0"/>
+                      </a:solidFill>
+                      <a:prstDash val="solid"/>
+                      <a:round/>
+                      <a:headEnd type="none" w="med" len="med"/>
+                      <a:tailEnd type="none" w="med" len="med"/>
+                    </a:lnL>
+                    <a:lnR w="9525" cap="flat" cmpd="sng" algn="ctr">
+                      <a:solidFill>
+                        <a:srgbClr val="C9D4E0"/>
+                      </a:solidFill>
+                      <a:prstDash val="solid"/>
+                      <a:round/>
+                      <a:headEnd type="none" w="med" len="med"/>
+                      <a:tailEnd type="none" w="med" len="med"/>
+                    </a:lnR>
+                    <a:lnT w="9525" cap="flat" cmpd="sng" algn="ctr">
+                      <a:solidFill>
+                        <a:srgbClr val="C9D4E0"/>
+                      </a:solidFill>
+                      <a:prstDash val="solid"/>
+                      <a:round/>
+                      <a:headEnd type="none" w="med" len="med"/>
+                      <a:tailEnd type="none" w="med" len="med"/>
+                    </a:lnT>
+                    <a:lnB w="9525" cap="flat" cmpd="sng" algn="ctr">
+                      <a:solidFill>
+                        <a:srgbClr val="C9D4E0"/>
+                      </a:solidFill>
+                      <a:prstDash val="solid"/>
+                      <a:round/>
+                      <a:headEnd type="none" w="med" len="med"/>
+                      <a:tailEnd type="none" w="med" len="med"/>
+                    </a:lnB>
+                    <a:solidFill>
+                      <a:srgbClr val="F3F5F8"/>
+                    </a:solidFill>
+                  </a:tcPr>
+                </a:tc>
+                <a:tc>
+                  <a:txBody>
+                    <a:bodyPr/>
+                    <a:lstStyle/>
+                    <a:p>
+                      <a:pPr indent="0" marL="0">
+                        <a:buNone/>
+                      </a:pPr>
+                      <a:r>
+                        <a:rPr lang="en-US" sz="850" dirty="0">
+                          <a:solidFill>
+                            <a:srgbClr val="1E293B"/>
+                          </a:solidFill>
+                          <a:latin typeface="Arial" pitchFamily="34" charset="0"/>
+                          <a:ea typeface="Arial" pitchFamily="34" charset="-122"/>
+                          <a:cs typeface="Arial" pitchFamily="34" charset="-120"/>
+                        </a:rPr>
+                        <a:t>Microsoft Sentinel</a:t>
+                      </a:r>
+                      <a:endParaRPr lang="en-US" sz="850" dirty="0">
+                        <a:latin typeface="Arial" charset="0"/>
+                        <a:ea typeface="Arial" charset="0"/>
+                        <a:cs typeface="Arial" charset="0"/>
+                      </a:endParaRPr>
+                    </a:p>
+                  </a:txBody>
+                  <a:tcPr marL="36576" marR="36576" marT="36576" marB="36576" anchor="ctr">
+                    <a:lnL w="9525" cap="flat" cmpd="sng" algn="ctr">
+                      <a:solidFill>
+                        <a:srgbClr val="C9D4E0"/>
+                      </a:solidFill>
+                      <a:prstDash val="solid"/>
+                      <a:round/>
+                      <a:headEnd type="none" w="med" len="med"/>
+                      <a:tailEnd type="none" w="med" len="med"/>
+                    </a:lnL>
+                    <a:lnR w="9525" cap="flat" cmpd="sng" algn="ctr">
+                      <a:solidFill>
+                        <a:srgbClr val="C9D4E0"/>
+                      </a:solidFill>
+                      <a:prstDash val="solid"/>
+                      <a:round/>
+                      <a:headEnd type="none" w="med" len="med"/>
+                      <a:tailEnd type="none" w="med" len="med"/>
+                    </a:lnR>
+                    <a:lnT w="9525" cap="flat" cmpd="sng" algn="ctr">
+                      <a:solidFill>
+                        <a:srgbClr val="C9D4E0"/>
+                      </a:solidFill>
+                      <a:prstDash val="solid"/>
+                      <a:round/>
+                      <a:headEnd type="none" w="med" len="med"/>
+                      <a:tailEnd type="none" w="med" len="med"/>
+                    </a:lnT>
+                    <a:lnB w="9525" cap="flat" cmpd="sng" algn="ctr">
+                      <a:solidFill>
+                        <a:srgbClr val="C9D4E0"/>
+                      </a:solidFill>
+                      <a:prstDash val="solid"/>
+                      <a:round/>
+                      <a:headEnd type="none" w="med" len="med"/>
+                      <a:tailEnd type="none" w="med" len="med"/>
+                    </a:lnB>
+                    <a:solidFill>
+                      <a:srgbClr val="F3F5F8"/>
+                    </a:solidFill>
+                  </a:tcPr>
+                </a:tc>
+                <a:tc>
+                  <a:txBody>
+                    <a:bodyPr/>
+                    <a:lstStyle/>
+                    <a:p>
+                      <a:pPr indent="0" marL="0">
+                        <a:buNone/>
+                      </a:pPr>
+                      <a:r>
+                        <a:rPr lang="en-US" sz="850" dirty="0">
+                          <a:solidFill>
+                            <a:srgbClr val="1E293B"/>
+                          </a:solidFill>
+                          <a:latin typeface="Arial" pitchFamily="34" charset="0"/>
+                          <a:ea typeface="Arial" pitchFamily="34" charset="-122"/>
+                          <a:cs typeface="Arial" pitchFamily="34" charset="-120"/>
+                        </a:rPr>
+                        <a:t>Splunk GovCloud; Elastic — slot contracts unchanged</a:t>
+                      </a:r>
+                      <a:endParaRPr lang="en-US" sz="850" dirty="0">
+                        <a:latin typeface="Arial" charset="0"/>
+                        <a:ea typeface="Arial" charset="0"/>
+                        <a:cs typeface="Arial" charset="0"/>
+                      </a:endParaRPr>
+                    </a:p>
+                  </a:txBody>
+                  <a:tcPr marL="36576" marR="36576" marT="36576" marB="36576" anchor="ctr">
+                    <a:lnL w="9525" cap="flat" cmpd="sng" algn="ctr">
+                      <a:solidFill>
+                        <a:srgbClr val="C9D4E0"/>
+                      </a:solidFill>
+                      <a:prstDash val="solid"/>
+                      <a:round/>
+                      <a:headEnd type="none" w="med" len="med"/>
+                      <a:tailEnd type="none" w="med" len="med"/>
+                    </a:lnL>
+                    <a:lnR w="9525" cap="flat" cmpd="sng" algn="ctr">
+                      <a:solidFill>
+                        <a:srgbClr val="C9D4E0"/>
+                      </a:solidFill>
+                      <a:prstDash val="solid"/>
+                      <a:round/>
+                      <a:headEnd type="none" w="med" len="med"/>
+                      <a:tailEnd type="none" w="med" len="med"/>
+                    </a:lnR>
+                    <a:lnT w="9525" cap="flat" cmpd="sng" algn="ctr">
+                      <a:solidFill>
+                        <a:srgbClr val="C9D4E0"/>
+                      </a:solidFill>
+                      <a:prstDash val="solid"/>
+                      <a:round/>
+                      <a:headEnd type="none" w="med" len="med"/>
+                      <a:tailEnd type="none" w="med" len="med"/>
+                    </a:lnT>
+                    <a:lnB w="9525" cap="flat" cmpd="sng" algn="ctr">
+                      <a:solidFill>
+                        <a:srgbClr val="C9D4E0"/>
+                      </a:solidFill>
+                      <a:prstDash val="solid"/>
+                      <a:round/>
+                      <a:headEnd type="none" w="med" len="med"/>
+                      <a:tailEnd type="none" w="med" len="med"/>
+                    </a:lnB>
+                    <a:solidFill>
+                      <a:srgbClr val="E6F5F2"/>
+                    </a:solidFill>
+                  </a:tcPr>
+                </a:tc>
+              </a:tr>
+            </a:tbl>
+          </a:graphicData>
+        </a:graphic>
+      </p:graphicFrame>
+      <p:sp>
+        <p:nvSpPr>
+          <p:cNvPr id="7" name="Shape 4"/>
+          <p:cNvSpPr/>
+          <p:nvPr/>
+        </p:nvSpPr>
+        <p:spPr>
+          <a:xfrm>
+            <a:off x="502920" y="4160520"/>
+            <a:ext cx="8229600" cy="640080"/>
           </a:xfrm>
           <a:prstGeom prst="roundRect">
             <a:avLst>
-              <a:gd name="adj" fmla="val 11290"/>
-            </a:avLst>
-          </a:prstGeom>
-          <a:solidFill>
-            <a:srgbClr val="E6F5F2"/>
-          </a:solidFill>
-          <a:ln w="9525">
-            <a:solidFill>
-              <a:srgbClr val="C9D4E0"/>
-            </a:solidFill>
-            <a:prstDash val="solid"/>
-          </a:ln>
-        </p:spPr>
-      </p:sp>
-      <p:sp>
-        <p:nvSpPr>
-          <p:cNvPr id="7" name="Text 5"/>
-          <p:cNvSpPr/>
-          <p:nvPr/>
-        </p:nvSpPr>
-        <p:spPr>
-          <a:xfrm>
-            <a:off x="658368" y="1280160"/>
-            <a:ext cx="365760" cy="457200"/>
-          </a:xfrm>
-          <a:prstGeom prst="rect">
-            <a:avLst/>
-          </a:prstGeom>
-          <a:noFill/>
-          <a:ln/>
-        </p:spPr>
-        <p:txBody>
-          <a:bodyPr wrap="square" lIns="0" tIns="0" rIns="0" bIns="0" rtlCol="0" anchor="ctr"/>
-          <a:lstStyle/>
-          <a:p>
-            <a:pPr indent="0" marL="0">
-              <a:buNone/>
-            </a:pPr>
-            <a:r>
-              <a:rPr lang="en-US" sz="1800" b="1" dirty="0">
-                <a:solidFill>
-                  <a:srgbClr val="1A9E8F"/>
-                </a:solidFill>
-                <a:latin typeface="Arial" pitchFamily="34" charset="0"/>
-                <a:ea typeface="Arial" pitchFamily="34" charset="-122"/>
-                <a:cs typeface="Arial" pitchFamily="34" charset="-120"/>
-              </a:rPr>
-              <a:t>✓</a:t>
-            </a:r>
-            <a:endParaRPr lang="en-US" sz="1800" dirty="0"/>
-          </a:p>
-        </p:txBody>
-      </p:sp>
-      <p:sp>
-        <p:nvSpPr>
-          <p:cNvPr id="8" name="Text 6"/>
-          <p:cNvSpPr/>
-          <p:nvPr/>
-        </p:nvSpPr>
-        <p:spPr>
-          <a:xfrm>
-            <a:off x="1097280" y="1234440"/>
-            <a:ext cx="7498080" cy="566928"/>
-          </a:xfrm>
-          <a:prstGeom prst="rect">
-            <a:avLst/>
-          </a:prstGeom>
-          <a:noFill/>
-          <a:ln/>
-        </p:spPr>
-        <p:txBody>
-          <a:bodyPr wrap="square" lIns="0" tIns="0" rIns="0" bIns="0" rtlCol="0" anchor="ctr"/>
-          <a:lstStyle/>
-          <a:p>
-            <a:pPr indent="0" marL="0">
-              <a:buNone/>
-            </a:pPr>
-            <a:r>
-              <a:rPr lang="en-US" sz="1000" dirty="0">
-                <a:solidFill>
-                  <a:srgbClr val="1E293B"/>
-                </a:solidFill>
-                <a:latin typeface="Arial" pitchFamily="34" charset="0"/>
-                <a:ea typeface="Arial" pitchFamily="34" charset="-122"/>
-                <a:cs typeface="Arial" pitchFamily="34" charset="-120"/>
-              </a:rPr>
-              <a:t>Phase 0–4 (Jul 3): Parts 1–17 delivered · slots 1–7 bound · OSCAL AP+AR+POA&amp;M bundle · all KSI themes covered</a:t>
-            </a:r>
-            <a:endParaRPr lang="en-US" sz="1000" dirty="0"/>
-          </a:p>
-        </p:txBody>
-      </p:sp>
-      <p:sp>
-        <p:nvSpPr>
-          <p:cNvPr id="9" name="Shape 7"/>
-          <p:cNvSpPr/>
-          <p:nvPr/>
-        </p:nvSpPr>
-        <p:spPr>
-          <a:xfrm>
-            <a:off x="502920" y="1892808"/>
-            <a:ext cx="8229600" cy="566928"/>
-          </a:xfrm>
-          <a:prstGeom prst="roundRect">
-            <a:avLst>
-              <a:gd name="adj" fmla="val 11290"/>
-            </a:avLst>
-          </a:prstGeom>
-          <a:solidFill>
-            <a:srgbClr val="E6F5F2"/>
-          </a:solidFill>
-          <a:ln w="9525">
-            <a:solidFill>
-              <a:srgbClr val="C9D4E0"/>
-            </a:solidFill>
-            <a:prstDash val="solid"/>
-          </a:ln>
-        </p:spPr>
-      </p:sp>
-      <p:sp>
-        <p:nvSpPr>
-          <p:cNvPr id="10" name="Text 8"/>
-          <p:cNvSpPr/>
-          <p:nvPr/>
-        </p:nvSpPr>
-        <p:spPr>
-          <a:xfrm>
-            <a:off x="658368" y="1938528"/>
-            <a:ext cx="365760" cy="457200"/>
-          </a:xfrm>
-          <a:prstGeom prst="rect">
-            <a:avLst/>
-          </a:prstGeom>
-          <a:noFill/>
-          <a:ln/>
-        </p:spPr>
-        <p:txBody>
-          <a:bodyPr wrap="square" lIns="0" tIns="0" rIns="0" bIns="0" rtlCol="0" anchor="ctr"/>
-          <a:lstStyle/>
-          <a:p>
-            <a:pPr indent="0" marL="0">
-              <a:buNone/>
-            </a:pPr>
-            <a:r>
-              <a:rPr lang="en-US" sz="1800" b="1" dirty="0">
-                <a:solidFill>
-                  <a:srgbClr val="1A9E8F"/>
-                </a:solidFill>
-                <a:latin typeface="Arial" pitchFamily="34" charset="0"/>
-                <a:ea typeface="Arial" pitchFamily="34" charset="-122"/>
-                <a:cs typeface="Arial" pitchFamily="34" charset="-120"/>
-              </a:rPr>
-              <a:t>✓</a:t>
-            </a:r>
-            <a:endParaRPr lang="en-US" sz="1800" dirty="0"/>
-          </a:p>
-        </p:txBody>
-      </p:sp>
-      <p:sp>
-        <p:nvSpPr>
-          <p:cNvPr id="11" name="Text 9"/>
-          <p:cNvSpPr/>
-          <p:nvPr/>
-        </p:nvSpPr>
-        <p:spPr>
-          <a:xfrm>
-            <a:off x="1097280" y="1892808"/>
-            <a:ext cx="7498080" cy="566928"/>
-          </a:xfrm>
-          <a:prstGeom prst="rect">
-            <a:avLst/>
-          </a:prstGeom>
-          <a:noFill/>
-          <a:ln/>
-        </p:spPr>
-        <p:txBody>
-          <a:bodyPr wrap="square" lIns="0" tIns="0" rIns="0" bIns="0" rtlCol="0" anchor="ctr"/>
-          <a:lstStyle/>
-          <a:p>
-            <a:pPr indent="0" marL="0">
-              <a:buNone/>
-            </a:pPr>
-            <a:r>
-              <a:rPr lang="en-US" sz="1000" dirty="0">
-                <a:solidFill>
-                  <a:srgbClr val="1E293B"/>
-                </a:solidFill>
-                <a:latin typeface="Arial" pitchFamily="34" charset="0"/>
-                <a:ea typeface="Arial" pitchFamily="34" charset="-122"/>
-                <a:cs typeface="Arial" pitchFamily="34" charset="-120"/>
-              </a:rPr>
-              <a:t>Phase 5 (Jul 4): Part 18 training — slot-08 bound; KSI-022 active at high confidence; zero scaffold rules remain</a:t>
-            </a:r>
-            <a:endParaRPr lang="en-US" sz="1000" dirty="0"/>
-          </a:p>
-        </p:txBody>
-      </p:sp>
-      <p:sp>
-        <p:nvSpPr>
-          <p:cNvPr id="12" name="Shape 10"/>
-          <p:cNvSpPr/>
-          <p:nvPr/>
-        </p:nvSpPr>
-        <p:spPr>
-          <a:xfrm>
-            <a:off x="502920" y="2551176"/>
-            <a:ext cx="8229600" cy="566928"/>
-          </a:xfrm>
-          <a:prstGeom prst="roundRect">
-            <a:avLst>
-              <a:gd name="adj" fmla="val 11290"/>
-            </a:avLst>
-          </a:prstGeom>
-          <a:solidFill>
-            <a:srgbClr val="E6F5F2"/>
-          </a:solidFill>
-          <a:ln w="9525">
-            <a:solidFill>
-              <a:srgbClr val="C9D4E0"/>
-            </a:solidFill>
-            <a:prstDash val="solid"/>
-          </a:ln>
-        </p:spPr>
-      </p:sp>
-      <p:sp>
-        <p:nvSpPr>
-          <p:cNvPr id="13" name="Text 11"/>
-          <p:cNvSpPr/>
-          <p:nvPr/>
-        </p:nvSpPr>
-        <p:spPr>
-          <a:xfrm>
-            <a:off x="658368" y="2596896"/>
-            <a:ext cx="365760" cy="457200"/>
-          </a:xfrm>
-          <a:prstGeom prst="rect">
-            <a:avLst/>
-          </a:prstGeom>
-          <a:noFill/>
-          <a:ln/>
-        </p:spPr>
-        <p:txBody>
-          <a:bodyPr wrap="square" lIns="0" tIns="0" rIns="0" bIns="0" rtlCol="0" anchor="ctr"/>
-          <a:lstStyle/>
-          <a:p>
-            <a:pPr indent="0" marL="0">
-              <a:buNone/>
-            </a:pPr>
-            <a:r>
-              <a:rPr lang="en-US" sz="1800" b="1" dirty="0">
-                <a:solidFill>
-                  <a:srgbClr val="1A9E8F"/>
-                </a:solidFill>
-                <a:latin typeface="Arial" pitchFamily="34" charset="0"/>
-                <a:ea typeface="Arial" pitchFamily="34" charset="-122"/>
-                <a:cs typeface="Arial" pitchFamily="34" charset="-120"/>
-              </a:rPr>
-              <a:t>✓</a:t>
-            </a:r>
-            <a:endParaRPr lang="en-US" sz="1800" dirty="0"/>
-          </a:p>
-        </p:txBody>
-      </p:sp>
-      <p:sp>
-        <p:nvSpPr>
-          <p:cNvPr id="14" name="Text 12"/>
-          <p:cNvSpPr/>
-          <p:nvPr/>
-        </p:nvSpPr>
-        <p:spPr>
-          <a:xfrm>
-            <a:off x="1097280" y="2551176"/>
-            <a:ext cx="7498080" cy="566928"/>
-          </a:xfrm>
-          <a:prstGeom prst="rect">
-            <a:avLst/>
-          </a:prstGeom>
-          <a:noFill/>
-          <a:ln/>
-        </p:spPr>
-        <p:txBody>
-          <a:bodyPr wrap="square" lIns="0" tIns="0" rIns="0" bIns="0" rtlCol="0" anchor="ctr"/>
-          <a:lstStyle/>
-          <a:p>
-            <a:pPr indent="0" marL="0">
-              <a:buNone/>
-            </a:pPr>
-            <a:r>
-              <a:rPr lang="en-US" sz="1000" dirty="0">
-                <a:solidFill>
-                  <a:srgbClr val="1E293B"/>
-                </a:solidFill>
-                <a:latin typeface="Arial" pitchFamily="34" charset="0"/>
-                <a:ea typeface="Arial" pitchFamily="34" charset="-122"/>
-                <a:cs typeface="Arial" pitchFamily="34" charset="-120"/>
-              </a:rPr>
-              <a:t>Phase 6 (Jul 5): Part 19 authorization package — 29/29 bundle committed · ScubaDrift verdicts wired · BOD 26-04 VDR/VER procedure · CA-7 ConMon cadence</a:t>
-            </a:r>
-            <a:endParaRPr lang="en-US" sz="1000" dirty="0"/>
-          </a:p>
-        </p:txBody>
-      </p:sp>
-      <p:sp>
-        <p:nvSpPr>
-          <p:cNvPr id="15" name="Shape 13"/>
-          <p:cNvSpPr/>
-          <p:nvPr/>
-        </p:nvSpPr>
-        <p:spPr>
-          <a:xfrm>
-            <a:off x="448056" y="3236976"/>
-            <a:ext cx="8339328" cy="795528"/>
-          </a:xfrm>
-          <a:prstGeom prst="roundRect">
-            <a:avLst>
-              <a:gd name="adj" fmla="val 10345"/>
-            </a:avLst>
-          </a:prstGeom>
-          <a:solidFill>
-            <a:srgbClr val="FFFFFF"/>
-          </a:solidFill>
-          <a:ln w="31750">
-            <a:solidFill>
-              <a:srgbClr val="D4860B"/>
-            </a:solidFill>
-            <a:prstDash val="solid"/>
-          </a:ln>
-          <a:effectLst>
-            <a:outerShdw sx="100000" sy="100000" kx="0" ky="0" algn="bl" rotWithShape="0" blurRad="88900" dist="25400" dir="2700000">
-              <a:srgbClr val="000000">
-                <a:alpha val="14000"/>
-              </a:srgbClr>
-            </a:outerShdw>
-          </a:effectLst>
-        </p:spPr>
-      </p:sp>
-      <p:sp>
-        <p:nvSpPr>
-          <p:cNvPr id="16" name="Shape 14"/>
-          <p:cNvSpPr/>
-          <p:nvPr/>
-        </p:nvSpPr>
-        <p:spPr>
-          <a:xfrm>
-            <a:off x="502920" y="3291840"/>
-            <a:ext cx="8229600" cy="685800"/>
-          </a:xfrm>
-          <a:prstGeom prst="roundRect">
-            <a:avLst>
-              <a:gd name="adj" fmla="val 9333"/>
-            </a:avLst>
-          </a:prstGeom>
-          <a:solidFill>
-            <a:srgbClr val="FBF3E4"/>
-          </a:solidFill>
-          <a:ln w="9525">
-            <a:solidFill>
-              <a:srgbClr val="C9D4E0"/>
-            </a:solidFill>
-            <a:prstDash val="solid"/>
-          </a:ln>
-          <a:effectLst>
-            <a:outerShdw sx="100000" sy="100000" kx="0" ky="0" algn="bl" rotWithShape="0" blurRad="88900" dist="25400" dir="2700000">
-              <a:srgbClr val="000000">
-                <a:alpha val="14000"/>
-              </a:srgbClr>
-            </a:outerShdw>
-          </a:effectLst>
-        </p:spPr>
-      </p:sp>
-      <p:sp>
-        <p:nvSpPr>
-          <p:cNvPr id="17" name="Text 15"/>
-          <p:cNvSpPr/>
-          <p:nvPr/>
-        </p:nvSpPr>
-        <p:spPr>
-          <a:xfrm>
-            <a:off x="731520" y="3346704"/>
-            <a:ext cx="7772400" cy="576072"/>
-          </a:xfrm>
-          <a:prstGeom prst="rect">
-            <a:avLst/>
-          </a:prstGeom>
-          <a:noFill/>
-          <a:ln/>
-        </p:spPr>
-        <p:txBody>
-          <a:bodyPr wrap="square" lIns="0" tIns="0" rIns="0" bIns="0" rtlCol="0" anchor="ctr"/>
-          <a:lstStyle/>
-          <a:p>
-            <a:pPr indent="0" marL="0">
-              <a:buNone/>
-            </a:pPr>
-            <a:r>
-              <a:rPr lang="en-US" sz="1100" b="1" dirty="0">
-                <a:solidFill>
-                  <a:srgbClr val="D4860B"/>
-                </a:solidFill>
-                <a:latin typeface="Arial" pitchFamily="34" charset="0"/>
-                <a:ea typeface="Arial" pitchFamily="34" charset="-122"/>
-                <a:cs typeface="Arial" pitchFamily="34" charset="-120"/>
-              </a:rPr>
-              <a:t>Phase 7 — submission   </a:t>
-            </a:r>
-            <a:pPr indent="0" marL="0">
-              <a:buNone/>
-            </a:pPr>
-            <a:r>
-              <a:rPr lang="en-US" sz="950" dirty="0">
-                <a:solidFill>
-                  <a:srgbClr val="1E293B"/>
-                </a:solidFill>
-                <a:latin typeface="Arial" pitchFamily="34" charset="0"/>
-                <a:ea typeface="Arial" pitchFamily="34" charset="-122"/>
-                <a:cs typeface="Arial" pitchFamily="34" charset="-120"/>
-              </a:rPr>
-              <a:t>Authorization package to FedRAMP PMO in the Class B/C window (opens Aug 31, 2026) · BOD 26-04 VDR/VER artifacts to CISA by Dec 7, 2026 · 20x ATO issued on the 29/29 AR</a:t>
-            </a:r>
-            <a:endParaRPr lang="en-US" sz="1100" dirty="0"/>
-          </a:p>
-        </p:txBody>
-      </p:sp>
-      <p:sp>
-        <p:nvSpPr>
-          <p:cNvPr id="18" name="Shape 16"/>
-          <p:cNvSpPr/>
-          <p:nvPr/>
-        </p:nvSpPr>
-        <p:spPr>
-          <a:xfrm>
-            <a:off x="502920" y="4069080"/>
-            <a:ext cx="8229600" cy="685800"/>
-          </a:xfrm>
-          <a:prstGeom prst="roundRect">
-            <a:avLst>
-              <a:gd name="adj" fmla="val 9333"/>
+              <a:gd name="adj" fmla="val 10000"/>
             </a:avLst>
           </a:prstGeom>
           <a:solidFill>
@@ -8583,14 +10646,14 @@
       </p:sp>
       <p:sp>
         <p:nvSpPr>
-          <p:cNvPr id="19" name="Text 17"/>
-          <p:cNvSpPr/>
-          <p:nvPr/>
-        </p:nvSpPr>
-        <p:spPr>
-          <a:xfrm>
-            <a:off x="731520" y="4123944"/>
-            <a:ext cx="7772400" cy="576072"/>
+          <p:cNvPr id="8" name="Text 5"/>
+          <p:cNvSpPr/>
+          <p:nvPr/>
+        </p:nvSpPr>
+        <p:spPr>
+          <a:xfrm>
+            <a:off x="731520" y="4160520"/>
+            <a:ext cx="7772400" cy="640080"/>
           </a:xfrm>
           <a:prstGeom prst="rect">
             <a:avLst/>
@@ -8606,7 +10669,7 @@
               <a:buNone/>
             </a:pPr>
             <a:r>
-              <a:rPr lang="en-US" sz="1100" b="1" dirty="0">
+              <a:rPr lang="en-US" sz="1000" b="1" dirty="0">
                 <a:solidFill>
                   <a:srgbClr val="1F3A5F"/>
                 </a:solidFill>
@@ -8614,13 +10677,13 @@
                 <a:ea typeface="Arial" pitchFamily="34" charset="-122"/>
                 <a:cs typeface="Arial" pitchFamily="34" charset="-120"/>
               </a:rPr>
-              <a:t>Phase 8 — ongoing ConMon   </a:t>
-            </a:r>
-            <a:pPr indent="0" marL="0">
-              <a:buNone/>
-            </a:pPr>
-            <a:r>
-              <a:rPr lang="en-US" sz="950" dirty="0">
+              <a:t>The doctrine, stated for leadership: </a:t>
+            </a:r>
+            <a:pPr indent="0" marL="0">
+              <a:buNone/>
+            </a:pPr>
+            <a:r>
+              <a:rPr lang="en-US" sz="1000" dirty="0">
                 <a:solidFill>
                   <a:srgbClr val="1E293B"/>
                 </a:solidFill>
@@ -8628,9 +10691,9 @@
                 <a:ea typeface="Arial" pitchFamily="34" charset="-122"/>
                 <a:cs typeface="Arial" pitchFamily="34" charset="-120"/>
               </a:rPr>
-              <a:t>Monthly bundle refresh + ScuBA assessment + POA&amp;M check · quarterly evidence-quality and training reviews · semi-annual IR drill and CP tabletop · annual full KSI re-assessment</a:t>
-            </a:r>
-            <a:endParaRPr lang="en-US" sz="1100" dirty="0"/>
+              <a:t>closure necessity names mechanism classes, never vendors. Multiple compliant paths exist before the agency chooses; exactly one exists after — the selected path becomes mandatory. Full 10-layer matrix in the roadmap document.</a:t>
+            </a:r>
+            <a:endParaRPr lang="en-US" sz="1000" dirty="0"/>
           </a:p>
         </p:txBody>
       </p:sp>
@@ -8699,7 +10762,7 @@
                 <a:ea typeface="Arial" pitchFamily="34" charset="-122"/>
                 <a:cs typeface="Arial" pitchFamily="34" charset="-120"/>
               </a:rPr>
-              <a:t>THE ASKS</a:t>
+              <a:t>THE REVIEW RESPONSE — ADOPTION LAYER</a:t>
             </a:r>
             <a:endParaRPr lang="en-US" sz="1100" dirty="0"/>
           </a:p>
@@ -8730,7 +10793,7 @@
               <a:buNone/>
             </a:pPr>
             <a:r>
-              <a:rPr lang="en-US" sz="2600" b="1" dirty="0">
+              <a:rPr lang="en-US" sz="2200" b="1" dirty="0">
                 <a:solidFill>
                   <a:srgbClr val="1F3A5F"/>
                 </a:solidFill>
@@ -8738,9 +10801,9 @@
                 <a:ea typeface="Arial" pitchFamily="34" charset="-122"/>
                 <a:cs typeface="Arial" pitchFamily="34" charset="-120"/>
               </a:rPr>
-              <a:t>Four actions, four dates</a:t>
-            </a:r>
-            <a:endParaRPr lang="en-US" sz="2600" dirty="0"/>
+              <a:t>The governance &amp; ownership model: who owns what, who decides</a:t>
+            </a:r>
+            <a:endParaRPr lang="en-US" sz="2200" dirty="0"/>
           </a:p>
         </p:txBody>
       </p:sp>
@@ -8777,7 +10840,7 @@
                 <a:ea typeface="Arial" pitchFamily="34" charset="-122"/>
                 <a:cs typeface="Arial" pitchFamily="34" charset="-120"/>
               </a:rPr>
-              <a:t>Federal AAN — ConMon Gap Roadmap · CSI Team Draft — Internal · FedRAMP Moderate · Date Code 2026-07-07 13:16 ET</a:t>
+              <a:t>Federal AAN — ConMon Gap Roadmap · CSI Team Draft — Internal · FedRAMP Moderate · Date Code 2026-07-07 15:28 ET</a:t>
             </a:r>
             <a:endParaRPr lang="en-US" sz="800" dirty="0"/>
           </a:p>
@@ -8830,12 +10893,12 @@
         </p:nvSpPr>
         <p:spPr>
           <a:xfrm>
-            <a:off x="502920" y="1234440"/>
-            <a:ext cx="4041648" cy="1481328"/>
+            <a:off x="457200" y="1234440"/>
+            <a:ext cx="2697480" cy="2743200"/>
           </a:xfrm>
           <a:prstGeom prst="roundRect">
             <a:avLst>
-              <a:gd name="adj" fmla="val 4321"/>
+              <a:gd name="adj" fmla="val 2373"/>
             </a:avLst>
           </a:prstGeom>
           <a:solidFill>
@@ -8864,16 +10927,16 @@
         </p:nvSpPr>
         <p:spPr>
           <a:xfrm>
-            <a:off x="630936" y="1362456"/>
-            <a:ext cx="3785616" cy="365760"/>
+            <a:off x="585216" y="1362456"/>
+            <a:ext cx="2441448" cy="512064"/>
           </a:xfrm>
           <a:prstGeom prst="roundRect">
             <a:avLst>
-              <a:gd name="adj" fmla="val 12500"/>
+              <a:gd name="adj" fmla="val 10714"/>
             </a:avLst>
           </a:prstGeom>
           <a:solidFill>
-            <a:srgbClr val="F3F5F8"/>
+            <a:srgbClr val="EDF3F9"/>
           </a:solidFill>
           <a:ln/>
         </p:spPr>
@@ -8886,8 +10949,8 @@
         </p:nvSpPr>
         <p:spPr>
           <a:xfrm>
-            <a:off x="758952" y="1362456"/>
-            <a:ext cx="3584448" cy="365760"/>
+            <a:off x="694944" y="1362456"/>
+            <a:ext cx="2258568" cy="512064"/>
           </a:xfrm>
           <a:prstGeom prst="rect">
             <a:avLst/>
@@ -8905,27 +10968,13 @@
             <a:r>
               <a:rPr lang="en-US" sz="1150" b="1" dirty="0">
                 <a:solidFill>
-                  <a:srgbClr val="1A9E8F"/>
-                </a:solidFill>
-                <a:latin typeface="Arial" pitchFamily="34" charset="0"/>
-                <a:ea typeface="Arial" pitchFamily="34" charset="-122"/>
-                <a:cs typeface="Arial" pitchFamily="34" charset="-120"/>
-              </a:rPr>
-              <a:t>Submit the package   </a:t>
-            </a:r>
-            <a:pPr indent="0" marL="0">
-              <a:buNone/>
-            </a:pPr>
-            <a:r>
-              <a:rPr lang="en-US" sz="900" b="1" dirty="0">
-                <a:solidFill>
-                  <a:srgbClr val="5B6B7C"/>
-                </a:solidFill>
-                <a:latin typeface="Arial" pitchFamily="34" charset="0"/>
-                <a:ea typeface="Arial" pitchFamily="34" charset="-122"/>
-                <a:cs typeface="Arial" pitchFamily="34" charset="-120"/>
-              </a:rPr>
-              <a:t>Aug 31, 2026 →</a:t>
+                  <a:srgbClr val="1F3A5F"/>
+                </a:solidFill>
+                <a:latin typeface="Arial" pitchFamily="34" charset="0"/>
+                <a:ea typeface="Arial" pitchFamily="34" charset="-122"/>
+                <a:cs typeface="Arial" pitchFamily="34" charset="-120"/>
+              </a:rPr>
+              <a:t>Track ownership matrix</a:t>
             </a:r>
             <a:endParaRPr lang="en-US" sz="1150" dirty="0"/>
           </a:p>
@@ -8939,8 +10988,8 @@
         </p:nvSpPr>
         <p:spPr>
           <a:xfrm>
-            <a:off x="685800" y="1801368"/>
-            <a:ext cx="3675888" cy="804672"/>
+            <a:off x="640080" y="2002536"/>
+            <a:ext cx="2331720" cy="1847088"/>
           </a:xfrm>
           <a:prstGeom prst="rect">
             <a:avLst/>
@@ -8956,7 +11005,7 @@
               <a:buNone/>
             </a:pPr>
             <a:r>
-              <a:rPr lang="en-US" sz="950" dirty="0">
+              <a:rPr lang="en-US" sz="900" dirty="0">
                 <a:solidFill>
                   <a:srgbClr val="1E293B"/>
                 </a:solidFill>
@@ -8964,9 +11013,9 @@
                 <a:ea typeface="Arial" pitchFamily="34" charset="-122"/>
                 <a:cs typeface="Arial" pitchFamily="34" charset="-120"/>
               </a:rPr>
-              <a:t>FedRAMP PMO, Class B/C window — opens Aug 31, 2026. The bundle is committed and ready; the decision to submit is leadership's.</a:t>
-            </a:r>
-            <a:endParaRPr lang="en-US" sz="950" dirty="0"/>
+              <a:t>Eighteen rows — one per series track — with exactly ONE Accountable owner each, plus Responsible, Consulted, Informed. Answers the standing question directly: Zero Trust is the doctrine every row implements; SCuBA is the Part 11/13 rows; compliance is the Part 19 row, where the AO is accountable.</a:t>
+            </a:r>
+            <a:endParaRPr lang="en-US" sz="900" dirty="0"/>
           </a:p>
         </p:txBody>
       </p:sp>
@@ -8978,12 +11027,12 @@
         </p:nvSpPr>
         <p:spPr>
           <a:xfrm>
-            <a:off x="4690872" y="1234440"/>
-            <a:ext cx="4041648" cy="1481328"/>
+            <a:off x="3264408" y="1234440"/>
+            <a:ext cx="2697480" cy="2743200"/>
           </a:xfrm>
           <a:prstGeom prst="roundRect">
             <a:avLst>
-              <a:gd name="adj" fmla="val 4321"/>
+              <a:gd name="adj" fmla="val 2373"/>
             </a:avLst>
           </a:prstGeom>
           <a:solidFill>
@@ -9012,16 +11061,16 @@
         </p:nvSpPr>
         <p:spPr>
           <a:xfrm>
-            <a:off x="4818888" y="1362456"/>
-            <a:ext cx="3785616" cy="365760"/>
+            <a:off x="3392424" y="1362456"/>
+            <a:ext cx="2441448" cy="512064"/>
           </a:xfrm>
           <a:prstGeom prst="roundRect">
             <a:avLst>
-              <a:gd name="adj" fmla="val 12500"/>
+              <a:gd name="adj" fmla="val 10714"/>
             </a:avLst>
           </a:prstGeom>
           <a:solidFill>
-            <a:srgbClr val="F3F5F8"/>
+            <a:srgbClr val="E6F5F2"/>
           </a:solidFill>
           <a:ln/>
         </p:spPr>
@@ -9034,8 +11083,8 @@
         </p:nvSpPr>
         <p:spPr>
           <a:xfrm>
-            <a:off x="4946904" y="1362456"/>
-            <a:ext cx="3584448" cy="365760"/>
+            <a:off x="3502152" y="1362456"/>
+            <a:ext cx="2258568" cy="512064"/>
           </a:xfrm>
           <a:prstGeom prst="rect">
             <a:avLst/>
@@ -9053,27 +11102,13 @@
             <a:r>
               <a:rPr lang="en-US" sz="1150" b="1" dirty="0">
                 <a:solidFill>
-                  <a:srgbClr val="C0392B"/>
-                </a:solidFill>
-                <a:latin typeface="Arial" pitchFamily="34" charset="0"/>
-                <a:ea typeface="Arial" pitchFamily="34" charset="-122"/>
-                <a:cs typeface="Arial" pitchFamily="34" charset="-120"/>
-              </a:rPr>
-              <a:t>File the VDR/VER artifacts   </a:t>
-            </a:r>
-            <a:pPr indent="0" marL="0">
-              <a:buNone/>
-            </a:pPr>
-            <a:r>
-              <a:rPr lang="en-US" sz="900" b="1" dirty="0">
-                <a:solidFill>
-                  <a:srgbClr val="5B6B7C"/>
-                </a:solidFill>
-                <a:latin typeface="Arial" pitchFamily="34" charset="0"/>
-                <a:ea typeface="Arial" pitchFamily="34" charset="-122"/>
-                <a:cs typeface="Arial" pitchFamily="34" charset="-120"/>
-              </a:rPr>
-              <a:t>by Dec 7, 2026</a:t>
+                  <a:srgbClr val="1A9E8F"/>
+                </a:solidFill>
+                <a:latin typeface="Arial" pitchFamily="34" charset="0"/>
+                <a:ea typeface="Arial" pitchFamily="34" charset="-122"/>
+                <a:cs typeface="Arial" pitchFamily="34" charset="-120"/>
+              </a:rPr>
+              <a:t>Decision-rights register (D1–D14)</a:t>
             </a:r>
             <a:endParaRPr lang="en-US" sz="1150" dirty="0"/>
           </a:p>
@@ -9087,8 +11122,8 @@
         </p:nvSpPr>
         <p:spPr>
           <a:xfrm>
-            <a:off x="4873752" y="1801368"/>
-            <a:ext cx="3675888" cy="804672"/>
+            <a:off x="3447288" y="2002536"/>
+            <a:ext cx="2331720" cy="1847088"/>
           </a:xfrm>
           <a:prstGeom prst="rect">
             <a:avLst/>
@@ -9104,7 +11139,7 @@
               <a:buNone/>
             </a:pPr>
             <a:r>
-              <a:rPr lang="en-US" sz="950" dirty="0">
+              <a:rPr lang="en-US" sz="900" dirty="0">
                 <a:solidFill>
                   <a:srgbClr val="1E293B"/>
                 </a:solidFill>
@@ -9112,9 +11147,9 @@
                 <a:ea typeface="Arial" pitchFamily="34" charset="-122"/>
                 <a:cs typeface="Arial" pitchFamily="34" charset="-120"/>
               </a:rPr>
-              <a:t>BOD 26-04 submission to CISA — machine-readable SBOM + vendor disclosure from the Part 15 pipeline. Hard deadline.</a:t>
-            </a:r>
-            <a:endParaRPr lang="en-US" sz="950" dirty="0"/>
+              <a:t>Every decision the series deferred to governance, each with one owner: Path A/B (D1), RADIUS platform (D3), SD-WAN hosting (D5), TIC posture (D6), gated-actuation approvals (D9), MAB and ScubaDrift exceptions (D10/D11), boundary-variance escalation (D12), submission (D13).</a:t>
+            </a:r>
+            <a:endParaRPr lang="en-US" sz="900" dirty="0"/>
           </a:p>
         </p:txBody>
       </p:sp>
@@ -9126,12 +11161,12 @@
         </p:nvSpPr>
         <p:spPr>
           <a:xfrm>
-            <a:off x="502920" y="2862072"/>
-            <a:ext cx="4041648" cy="1481328"/>
+            <a:off x="6071616" y="1234440"/>
+            <a:ext cx="2697480" cy="2743200"/>
           </a:xfrm>
           <a:prstGeom prst="roundRect">
             <a:avLst>
-              <a:gd name="adj" fmla="val 4321"/>
+              <a:gd name="adj" fmla="val 2373"/>
             </a:avLst>
           </a:prstGeom>
           <a:solidFill>
@@ -9160,16 +11195,16 @@
         </p:nvSpPr>
         <p:spPr>
           <a:xfrm>
-            <a:off x="630936" y="2990088"/>
-            <a:ext cx="3785616" cy="365760"/>
+            <a:off x="6199632" y="1362456"/>
+            <a:ext cx="2441448" cy="512064"/>
           </a:xfrm>
           <a:prstGeom prst="roundRect">
             <a:avLst>
-              <a:gd name="adj" fmla="val 12500"/>
+              <a:gd name="adj" fmla="val 10714"/>
             </a:avLst>
           </a:prstGeom>
           <a:solidFill>
-            <a:srgbClr val="F3F5F8"/>
+            <a:srgbClr val="FBF3E4"/>
           </a:solidFill>
           <a:ln/>
         </p:spPr>
@@ -9182,8 +11217,8 @@
         </p:nvSpPr>
         <p:spPr>
           <a:xfrm>
-            <a:off x="758952" y="2990088"/>
-            <a:ext cx="3584448" cy="365760"/>
+            <a:off x="6309360" y="1362456"/>
+            <a:ext cx="2258568" cy="512064"/>
           </a:xfrm>
           <a:prstGeom prst="rect">
             <a:avLst/>
@@ -9207,21 +11242,7 @@
                 <a:ea typeface="Arial" pitchFamily="34" charset="-122"/>
                 <a:cs typeface="Arial" pitchFamily="34" charset="-120"/>
               </a:rPr>
-              <a:t>Map the 5.2.0 controls   </a:t>
-            </a:r>
-            <a:pPr indent="0" marL="0">
-              <a:buNone/>
-            </a:pPr>
-            <a:r>
-              <a:rPr lang="en-US" sz="900" b="1" dirty="0">
-                <a:solidFill>
-                  <a:srgbClr val="5B6B7C"/>
-                </a:solidFill>
-                <a:latin typeface="Arial" pitchFamily="34" charset="0"/>
-                <a:ea typeface="Arial" pitchFamily="34" charset="-122"/>
-                <a:cs typeface="Arial" pitchFamily="34" charset="-120"/>
-              </a:rPr>
-              <a:t>before next assessment</a:t>
+              <a:t>Go / no-go criteria</a:t>
             </a:r>
             <a:endParaRPr lang="en-US" sz="1150" dirty="0"/>
           </a:p>
@@ -9235,8 +11256,8 @@
         </p:nvSpPr>
         <p:spPr>
           <a:xfrm>
-            <a:off x="685800" y="3429000"/>
-            <a:ext cx="3675888" cy="804672"/>
+            <a:off x="6254496" y="2002536"/>
+            <a:ext cx="2331720" cy="1847088"/>
           </a:xfrm>
           <a:prstGeom prst="rect">
             <a:avLst/>
@@ -9252,7 +11273,7 @@
               <a:buNone/>
             </a:pPr>
             <a:r>
-              <a:rPr lang="en-US" sz="950" dirty="0">
+              <a:rPr lang="en-US" sz="900" dirty="0">
                 <a:solidFill>
                   <a:srgbClr val="1E293B"/>
                 </a:solidFill>
@@ -9260,9 +11281,9 @@
                 <a:ea typeface="Arial" pitchFamily="34" charset="-122"/>
                 <a:cs typeface="Arial" pitchFamily="34" charset="-120"/>
               </a:rPr>
-              <a:t>SA-15(13), SA-24, SI-2(7) into the Parts 11/15 closure tables before FedRAMP incorporates the deltas.</a:t>
-            </a:r>
-            <a:endParaRPr lang="en-US" sz="950" dirty="0"/>
+              <a:t>Six gates that stop an enforcement phase from breaking a field office: baseline unexplained, exception backlog open, no same-day rollback, Help Desk unbriefed, telework parity untested, peak-period freeze. Recorded per site by the track's Accountable, with OIS concurrence.</a:t>
+            </a:r>
+            <a:endParaRPr lang="en-US" sz="900" dirty="0"/>
           </a:p>
         </p:txBody>
       </p:sp>
@@ -9274,16 +11295,16 @@
         </p:nvSpPr>
         <p:spPr>
           <a:xfrm>
-            <a:off x="4690872" y="2862072"/>
-            <a:ext cx="4041648" cy="1481328"/>
+            <a:off x="502920" y="4160520"/>
+            <a:ext cx="8229600" cy="640080"/>
           </a:xfrm>
           <a:prstGeom prst="roundRect">
             <a:avLst>
-              <a:gd name="adj" fmla="val 4321"/>
+              <a:gd name="adj" fmla="val 10000"/>
             </a:avLst>
           </a:prstGeom>
           <a:solidFill>
-            <a:srgbClr val="FFFFFF"/>
+            <a:srgbClr val="FBF3E4"/>
           </a:solidFill>
           <a:ln w="9525">
             <a:solidFill>
@@ -9302,36 +11323,282 @@
       </p:sp>
       <p:sp>
         <p:nvSpPr>
-          <p:cNvPr id="19" name="Shape 17"/>
-          <p:cNvSpPr/>
-          <p:nvPr/>
-        </p:nvSpPr>
-        <p:spPr>
-          <a:xfrm>
-            <a:off x="4818888" y="2990088"/>
-            <a:ext cx="3785616" cy="365760"/>
+          <p:cNvPr id="19" name="Text 17"/>
+          <p:cNvSpPr/>
+          <p:nvPr/>
+        </p:nvSpPr>
+        <p:spPr>
+          <a:xfrm>
+            <a:off x="731520" y="4160520"/>
+            <a:ext cx="7772400" cy="640080"/>
+          </a:xfrm>
+          <a:prstGeom prst="rect">
+            <a:avLst/>
+          </a:prstGeom>
+          <a:noFill/>
+          <a:ln/>
+        </p:spPr>
+        <p:txBody>
+          <a:bodyPr wrap="square" lIns="0" tIns="0" rIns="0" bIns="0" rtlCol="0" anchor="ctr"/>
+          <a:lstStyle/>
+          <a:p>
+            <a:pPr indent="0" marL="0">
+              <a:buNone/>
+            </a:pPr>
+            <a:r>
+              <a:rPr lang="en-US" sz="1050" b="1" dirty="0">
+                <a:solidFill>
+                  <a:srgbClr val="8A6210"/>
+                </a:solidFill>
+                <a:latin typeface="Arial" pitchFamily="34" charset="0"/>
+                <a:ea typeface="Arial" pitchFamily="34" charset="-122"/>
+                <a:cs typeface="Arial" pitchFamily="34" charset="-120"/>
+              </a:rPr>
+              <a:t>The new first ask — D0: </a:t>
+            </a:r>
+            <a:pPr indent="0" marL="0">
+              <a:buNone/>
+            </a:pPr>
+            <a:r>
+              <a:rPr lang="en-US" sz="1050" dirty="0">
+                <a:solidFill>
+                  <a:srgbClr val="1E293B"/>
+                </a:solidFill>
+                <a:latin typeface="Arial" pitchFamily="34" charset="0"/>
+                <a:ea typeface="Arial" pitchFamily="34" charset="-122"/>
+                <a:cs typeface="Arial" pitchFamily="34" charset="-120"/>
+              </a:rPr>
+              <a:t>ratify the governance &amp; ownership model itself. Every assignment is a CSI Team recommendation pending CIO Office / OIS ratification; ratification unblocks every other decision in the register.</a:t>
+            </a:r>
+            <a:endParaRPr lang="en-US" sz="1050" dirty="0"/>
+          </a:p>
+        </p:txBody>
+      </p:sp>
+    </p:spTree>
+  </p:cSld>
+  <p:clrMapOvr>
+    <a:masterClrMapping/>
+  </p:clrMapOvr>
+</p:sld>
+</file>
+
+<file path=ppt/slides/slide9.xml><?xml version="1.0" encoding="utf-8"?>
+<p:sld xmlns:a="http://schemas.openxmlformats.org/drawingml/2006/main" xmlns:r="http://schemas.openxmlformats.org/officeDocument/2006/relationships" xmlns:p="http://schemas.openxmlformats.org/presentationml/2006/main">
+  <p:cSld name="Slide 9">
+    <p:bg>
+      <p:bgPr>
+        <a:solidFill>
+          <a:srgbClr val="FFFFFF"/>
+        </a:solidFill>
+      </p:bgPr>
+    </p:bg>
+    <p:spTree>
+      <p:nvGrpSpPr>
+        <p:cNvPr id="1" name=""/>
+        <p:cNvGrpSpPr/>
+        <p:nvPr/>
+      </p:nvGrpSpPr>
+      <p:grpSpPr>
+        <a:xfrm>
+          <a:off x="0" y="0"/>
+          <a:ext cx="0" cy="0"/>
+          <a:chOff x="0" y="0"/>
+          <a:chExt cx="0" cy="0"/>
+        </a:xfrm>
+      </p:grpSpPr>
+      <p:sp>
+        <p:nvSpPr>
+          <p:cNvPr id="2" name="Text 0"/>
+          <p:cNvSpPr/>
+          <p:nvPr/>
+        </p:nvSpPr>
+        <p:spPr>
+          <a:xfrm>
+            <a:off x="502920" y="256032"/>
+            <a:ext cx="8229600" cy="274320"/>
+          </a:xfrm>
+          <a:prstGeom prst="rect">
+            <a:avLst/>
+          </a:prstGeom>
+          <a:noFill/>
+          <a:ln/>
+        </p:spPr>
+        <p:txBody>
+          <a:bodyPr wrap="square" lIns="0" tIns="0" rIns="0" bIns="0" rtlCol="0" anchor="ctr"/>
+          <a:lstStyle/>
+          <a:p>
+            <a:pPr indent="0" marL="0">
+              <a:buNone/>
+            </a:pPr>
+            <a:r>
+              <a:rPr lang="en-US" sz="1100" b="1" spc="200" kern="0" dirty="0">
+                <a:solidFill>
+                  <a:srgbClr val="1A9E8F"/>
+                </a:solidFill>
+                <a:latin typeface="Arial" pitchFamily="34" charset="0"/>
+                <a:ea typeface="Arial" pitchFamily="34" charset="-122"/>
+                <a:cs typeface="Arial" pitchFamily="34" charset="-120"/>
+              </a:rPr>
+              <a:t>WHERE THE PROGRAM STANDS</a:t>
+            </a:r>
+            <a:endParaRPr lang="en-US" sz="1100" dirty="0"/>
+          </a:p>
+        </p:txBody>
+      </p:sp>
+      <p:sp>
+        <p:nvSpPr>
+          <p:cNvPr id="3" name="Text 1"/>
+          <p:cNvSpPr/>
+          <p:nvPr/>
+        </p:nvSpPr>
+        <p:spPr>
+          <a:xfrm>
+            <a:off x="502920" y="512064"/>
+            <a:ext cx="8138160" cy="566928"/>
+          </a:xfrm>
+          <a:prstGeom prst="rect">
+            <a:avLst/>
+          </a:prstGeom>
+          <a:noFill/>
+          <a:ln/>
+        </p:spPr>
+        <p:txBody>
+          <a:bodyPr wrap="square" lIns="0" tIns="0" rIns="0" bIns="0" rtlCol="0" anchor="ctr"/>
+          <a:lstStyle/>
+          <a:p>
+            <a:pPr indent="0" marL="0">
+              <a:buNone/>
+            </a:pPr>
+            <a:r>
+              <a:rPr lang="en-US" sz="2600" b="1" dirty="0">
+                <a:solidFill>
+                  <a:srgbClr val="1F3A5F"/>
+                </a:solidFill>
+                <a:latin typeface="Arial" pitchFamily="34" charset="0"/>
+                <a:ea typeface="Arial" pitchFamily="34" charset="-122"/>
+                <a:cs typeface="Arial" pitchFamily="34" charset="-120"/>
+              </a:rPr>
+              <a:t>Phases 0–6 complete; two phases remain — and both have dates</a:t>
+            </a:r>
+            <a:endParaRPr lang="en-US" sz="2600" dirty="0"/>
+          </a:p>
+        </p:txBody>
+      </p:sp>
+      <p:sp>
+        <p:nvSpPr>
+          <p:cNvPr id="4" name="Text 2"/>
+          <p:cNvSpPr/>
+          <p:nvPr/>
+        </p:nvSpPr>
+        <p:spPr>
+          <a:xfrm>
+            <a:off x="502920" y="4864608"/>
+            <a:ext cx="7315200" cy="219456"/>
+          </a:xfrm>
+          <a:prstGeom prst="rect">
+            <a:avLst/>
+          </a:prstGeom>
+          <a:noFill/>
+          <a:ln/>
+        </p:spPr>
+        <p:txBody>
+          <a:bodyPr wrap="square" lIns="0" tIns="0" rIns="0" bIns="0" rtlCol="0" anchor="ctr"/>
+          <a:lstStyle/>
+          <a:p>
+            <a:pPr indent="0" marL="0">
+              <a:buNone/>
+            </a:pPr>
+            <a:r>
+              <a:rPr lang="en-US" sz="800" dirty="0">
+                <a:solidFill>
+                  <a:srgbClr val="5B6B7C"/>
+                </a:solidFill>
+                <a:latin typeface="Arial" pitchFamily="34" charset="0"/>
+                <a:ea typeface="Arial" pitchFamily="34" charset="-122"/>
+                <a:cs typeface="Arial" pitchFamily="34" charset="-120"/>
+              </a:rPr>
+              <a:t>Federal AAN — ConMon Gap Roadmap · CSI Team Draft — Internal · FedRAMP Moderate · Date Code 2026-07-07 15:28 ET</a:t>
+            </a:r>
+            <a:endParaRPr lang="en-US" sz="800" dirty="0"/>
+          </a:p>
+        </p:txBody>
+      </p:sp>
+      <p:sp>
+        <p:nvSpPr>
+          <p:cNvPr id="5" name="Text 3"/>
+          <p:cNvSpPr/>
+          <p:nvPr/>
+        </p:nvSpPr>
+        <p:spPr>
+          <a:xfrm>
+            <a:off x="8412480" y="4864608"/>
+            <a:ext cx="320040" cy="219456"/>
+          </a:xfrm>
+          <a:prstGeom prst="rect">
+            <a:avLst/>
+          </a:prstGeom>
+          <a:noFill/>
+          <a:ln/>
+        </p:spPr>
+        <p:txBody>
+          <a:bodyPr wrap="square" lIns="0" tIns="0" rIns="0" bIns="0" rtlCol="0" anchor="ctr"/>
+          <a:lstStyle/>
+          <a:p>
+            <a:pPr algn="r" indent="0" marL="0">
+              <a:buNone/>
+            </a:pPr>
+            <a:r>
+              <a:rPr lang="en-US" sz="800" dirty="0">
+                <a:solidFill>
+                  <a:srgbClr val="5B6B7C"/>
+                </a:solidFill>
+                <a:latin typeface="Arial" pitchFamily="34" charset="0"/>
+                <a:ea typeface="Arial" pitchFamily="34" charset="-122"/>
+                <a:cs typeface="Arial" pitchFamily="34" charset="-120"/>
+              </a:rPr>
+              <a:t>9</a:t>
+            </a:r>
+            <a:endParaRPr lang="en-US" sz="800" dirty="0"/>
+          </a:p>
+        </p:txBody>
+      </p:sp>
+      <p:sp>
+        <p:nvSpPr>
+          <p:cNvPr id="6" name="Shape 4"/>
+          <p:cNvSpPr/>
+          <p:nvPr/>
+        </p:nvSpPr>
+        <p:spPr>
+          <a:xfrm>
+            <a:off x="502920" y="1234440"/>
+            <a:ext cx="8229600" cy="566928"/>
           </a:xfrm>
           <a:prstGeom prst="roundRect">
             <a:avLst>
-              <a:gd name="adj" fmla="val 12500"/>
+              <a:gd name="adj" fmla="val 11290"/>
             </a:avLst>
           </a:prstGeom>
           <a:solidFill>
-            <a:srgbClr val="F3F5F8"/>
+            <a:srgbClr val="E6F5F2"/>
           </a:solidFill>
-          <a:ln/>
-        </p:spPr>
-      </p:sp>
-      <p:sp>
-        <p:nvSpPr>
-          <p:cNvPr id="20" name="Text 18"/>
-          <p:cNvSpPr/>
-          <p:nvPr/>
-        </p:nvSpPr>
-        <p:spPr>
-          <a:xfrm>
-            <a:off x="4946904" y="2990088"/>
-            <a:ext cx="3584448" cy="365760"/>
+          <a:ln w="9525">
+            <a:solidFill>
+              <a:srgbClr val="C9D4E0"/>
+            </a:solidFill>
+            <a:prstDash val="solid"/>
+          </a:ln>
+        </p:spPr>
+      </p:sp>
+      <p:sp>
+        <p:nvSpPr>
+          <p:cNvPr id="7" name="Text 5"/>
+          <p:cNvSpPr/>
+          <p:nvPr/>
+        </p:nvSpPr>
+        <p:spPr>
+          <a:xfrm>
+            <a:off x="658368" y="1280160"/>
+            <a:ext cx="365760" cy="457200"/>
           </a:xfrm>
           <a:prstGeom prst="rect">
             <a:avLst/>
@@ -9347,44 +11614,30 @@
               <a:buNone/>
             </a:pPr>
             <a:r>
-              <a:rPr lang="en-US" sz="1150" b="1" dirty="0">
-                <a:solidFill>
-                  <a:srgbClr val="1F3A5F"/>
-                </a:solidFill>
-                <a:latin typeface="Arial" pitchFamily="34" charset="0"/>
-                <a:ea typeface="Arial" pitchFamily="34" charset="-122"/>
-                <a:cs typeface="Arial" pitchFamily="34" charset="-120"/>
-              </a:rPr>
-              <a:t>Check the crypto estate   </a:t>
-            </a:r>
-            <a:pPr indent="0" marL="0">
-              <a:buNone/>
-            </a:pPr>
-            <a:r>
-              <a:rPr lang="en-US" sz="900" b="1" dirty="0">
-                <a:solidFill>
-                  <a:srgbClr val="5B6B7C"/>
-                </a:solidFill>
-                <a:latin typeface="Arial" pitchFamily="34" charset="0"/>
-                <a:ea typeface="Arial" pitchFamily="34" charset="-122"/>
-                <a:cs typeface="Arial" pitchFamily="34" charset="-120"/>
-              </a:rPr>
-              <a:t>by Sep 21, 2026</a:t>
-            </a:r>
-            <a:endParaRPr lang="en-US" sz="1150" dirty="0"/>
-          </a:p>
-        </p:txBody>
-      </p:sp>
-      <p:sp>
-        <p:nvSpPr>
-          <p:cNvPr id="21" name="Text 19"/>
-          <p:cNvSpPr/>
-          <p:nvPr/>
-        </p:nvSpPr>
-        <p:spPr>
-          <a:xfrm>
-            <a:off x="4873752" y="3429000"/>
-            <a:ext cx="3675888" cy="804672"/>
+              <a:rPr lang="en-US" sz="1800" b="1" dirty="0">
+                <a:solidFill>
+                  <a:srgbClr val="1A9E8F"/>
+                </a:solidFill>
+                <a:latin typeface="Arial" pitchFamily="34" charset="0"/>
+                <a:ea typeface="Arial" pitchFamily="34" charset="-122"/>
+                <a:cs typeface="Arial" pitchFamily="34" charset="-120"/>
+              </a:rPr>
+              <a:t>✓</a:t>
+            </a:r>
+            <a:endParaRPr lang="en-US" sz="1800" dirty="0"/>
+          </a:p>
+        </p:txBody>
+      </p:sp>
+      <p:sp>
+        <p:nvSpPr>
+          <p:cNvPr id="8" name="Text 6"/>
+          <p:cNvSpPr/>
+          <p:nvPr/>
+        </p:nvSpPr>
+        <p:spPr>
+          <a:xfrm>
+            <a:off x="1097280" y="1234440"/>
+            <a:ext cx="7498080" cy="566928"/>
           </a:xfrm>
           <a:prstGeom prst="rect">
             <a:avLst/>
@@ -9400,7 +11653,7 @@
               <a:buNone/>
             </a:pPr>
             <a:r>
-              <a:rPr lang="en-US" sz="950" dirty="0">
+              <a:rPr lang="en-US" sz="1000" dirty="0">
                 <a:solidFill>
                   <a:srgbClr val="1E293B"/>
                 </a:solidFill>
@@ -9408,26 +11661,357 @@
                 <a:ea typeface="Arial" pitchFamily="34" charset="-122"/>
                 <a:cs typeface="Arial" pitchFamily="34" charset="-120"/>
               </a:rPr>
-              <a:t>FIPS 140-2-only modules lose procurement standing Sep 21, 2026; M-23-02 crypto inventory feeds the 2030/2035 PQC arc.</a:t>
-            </a:r>
-            <a:endParaRPr lang="en-US" sz="950" dirty="0"/>
-          </a:p>
-        </p:txBody>
-      </p:sp>
-      <p:sp>
-        <p:nvSpPr>
-          <p:cNvPr id="22" name="Shape 20"/>
-          <p:cNvSpPr/>
-          <p:nvPr/>
-        </p:nvSpPr>
-        <p:spPr>
-          <a:xfrm>
-            <a:off x="502920" y="4434840"/>
-            <a:ext cx="8229600" cy="384048"/>
+              <a:t>Phase 0–4 (Jul 3): Parts 1–17 delivered · slots 1–7 bound · OSCAL AP+AR+POA&amp;M bundle · all KSI themes covered</a:t>
+            </a:r>
+            <a:endParaRPr lang="en-US" sz="1000" dirty="0"/>
+          </a:p>
+        </p:txBody>
+      </p:sp>
+      <p:sp>
+        <p:nvSpPr>
+          <p:cNvPr id="9" name="Shape 7"/>
+          <p:cNvSpPr/>
+          <p:nvPr/>
+        </p:nvSpPr>
+        <p:spPr>
+          <a:xfrm>
+            <a:off x="502920" y="1892808"/>
+            <a:ext cx="8229600" cy="566928"/>
           </a:xfrm>
           <a:prstGeom prst="roundRect">
             <a:avLst>
-              <a:gd name="adj" fmla="val 16667"/>
+              <a:gd name="adj" fmla="val 11290"/>
+            </a:avLst>
+          </a:prstGeom>
+          <a:solidFill>
+            <a:srgbClr val="E6F5F2"/>
+          </a:solidFill>
+          <a:ln w="9525">
+            <a:solidFill>
+              <a:srgbClr val="C9D4E0"/>
+            </a:solidFill>
+            <a:prstDash val="solid"/>
+          </a:ln>
+        </p:spPr>
+      </p:sp>
+      <p:sp>
+        <p:nvSpPr>
+          <p:cNvPr id="10" name="Text 8"/>
+          <p:cNvSpPr/>
+          <p:nvPr/>
+        </p:nvSpPr>
+        <p:spPr>
+          <a:xfrm>
+            <a:off x="658368" y="1938528"/>
+            <a:ext cx="365760" cy="457200"/>
+          </a:xfrm>
+          <a:prstGeom prst="rect">
+            <a:avLst/>
+          </a:prstGeom>
+          <a:noFill/>
+          <a:ln/>
+        </p:spPr>
+        <p:txBody>
+          <a:bodyPr wrap="square" lIns="0" tIns="0" rIns="0" bIns="0" rtlCol="0" anchor="ctr"/>
+          <a:lstStyle/>
+          <a:p>
+            <a:pPr indent="0" marL="0">
+              <a:buNone/>
+            </a:pPr>
+            <a:r>
+              <a:rPr lang="en-US" sz="1800" b="1" dirty="0">
+                <a:solidFill>
+                  <a:srgbClr val="1A9E8F"/>
+                </a:solidFill>
+                <a:latin typeface="Arial" pitchFamily="34" charset="0"/>
+                <a:ea typeface="Arial" pitchFamily="34" charset="-122"/>
+                <a:cs typeface="Arial" pitchFamily="34" charset="-120"/>
+              </a:rPr>
+              <a:t>✓</a:t>
+            </a:r>
+            <a:endParaRPr lang="en-US" sz="1800" dirty="0"/>
+          </a:p>
+        </p:txBody>
+      </p:sp>
+      <p:sp>
+        <p:nvSpPr>
+          <p:cNvPr id="11" name="Text 9"/>
+          <p:cNvSpPr/>
+          <p:nvPr/>
+        </p:nvSpPr>
+        <p:spPr>
+          <a:xfrm>
+            <a:off x="1097280" y="1892808"/>
+            <a:ext cx="7498080" cy="566928"/>
+          </a:xfrm>
+          <a:prstGeom prst="rect">
+            <a:avLst/>
+          </a:prstGeom>
+          <a:noFill/>
+          <a:ln/>
+        </p:spPr>
+        <p:txBody>
+          <a:bodyPr wrap="square" lIns="0" tIns="0" rIns="0" bIns="0" rtlCol="0" anchor="ctr"/>
+          <a:lstStyle/>
+          <a:p>
+            <a:pPr indent="0" marL="0">
+              <a:buNone/>
+            </a:pPr>
+            <a:r>
+              <a:rPr lang="en-US" sz="1000" dirty="0">
+                <a:solidFill>
+                  <a:srgbClr val="1E293B"/>
+                </a:solidFill>
+                <a:latin typeface="Arial" pitchFamily="34" charset="0"/>
+                <a:ea typeface="Arial" pitchFamily="34" charset="-122"/>
+                <a:cs typeface="Arial" pitchFamily="34" charset="-120"/>
+              </a:rPr>
+              <a:t>Phase 5 (Jul 4): Part 18 training — slot-08 bound; KSI-022 active at high confidence; zero scaffold rules remain</a:t>
+            </a:r>
+            <a:endParaRPr lang="en-US" sz="1000" dirty="0"/>
+          </a:p>
+        </p:txBody>
+      </p:sp>
+      <p:sp>
+        <p:nvSpPr>
+          <p:cNvPr id="12" name="Shape 10"/>
+          <p:cNvSpPr/>
+          <p:nvPr/>
+        </p:nvSpPr>
+        <p:spPr>
+          <a:xfrm>
+            <a:off x="502920" y="2551176"/>
+            <a:ext cx="8229600" cy="566928"/>
+          </a:xfrm>
+          <a:prstGeom prst="roundRect">
+            <a:avLst>
+              <a:gd name="adj" fmla="val 11290"/>
+            </a:avLst>
+          </a:prstGeom>
+          <a:solidFill>
+            <a:srgbClr val="E6F5F2"/>
+          </a:solidFill>
+          <a:ln w="9525">
+            <a:solidFill>
+              <a:srgbClr val="C9D4E0"/>
+            </a:solidFill>
+            <a:prstDash val="solid"/>
+          </a:ln>
+        </p:spPr>
+      </p:sp>
+      <p:sp>
+        <p:nvSpPr>
+          <p:cNvPr id="13" name="Text 11"/>
+          <p:cNvSpPr/>
+          <p:nvPr/>
+        </p:nvSpPr>
+        <p:spPr>
+          <a:xfrm>
+            <a:off x="658368" y="2596896"/>
+            <a:ext cx="365760" cy="457200"/>
+          </a:xfrm>
+          <a:prstGeom prst="rect">
+            <a:avLst/>
+          </a:prstGeom>
+          <a:noFill/>
+          <a:ln/>
+        </p:spPr>
+        <p:txBody>
+          <a:bodyPr wrap="square" lIns="0" tIns="0" rIns="0" bIns="0" rtlCol="0" anchor="ctr"/>
+          <a:lstStyle/>
+          <a:p>
+            <a:pPr indent="0" marL="0">
+              <a:buNone/>
+            </a:pPr>
+            <a:r>
+              <a:rPr lang="en-US" sz="1800" b="1" dirty="0">
+                <a:solidFill>
+                  <a:srgbClr val="1A9E8F"/>
+                </a:solidFill>
+                <a:latin typeface="Arial" pitchFamily="34" charset="0"/>
+                <a:ea typeface="Arial" pitchFamily="34" charset="-122"/>
+                <a:cs typeface="Arial" pitchFamily="34" charset="-120"/>
+              </a:rPr>
+              <a:t>✓</a:t>
+            </a:r>
+            <a:endParaRPr lang="en-US" sz="1800" dirty="0"/>
+          </a:p>
+        </p:txBody>
+      </p:sp>
+      <p:sp>
+        <p:nvSpPr>
+          <p:cNvPr id="14" name="Text 12"/>
+          <p:cNvSpPr/>
+          <p:nvPr/>
+        </p:nvSpPr>
+        <p:spPr>
+          <a:xfrm>
+            <a:off x="1097280" y="2551176"/>
+            <a:ext cx="7498080" cy="566928"/>
+          </a:xfrm>
+          <a:prstGeom prst="rect">
+            <a:avLst/>
+          </a:prstGeom>
+          <a:noFill/>
+          <a:ln/>
+        </p:spPr>
+        <p:txBody>
+          <a:bodyPr wrap="square" lIns="0" tIns="0" rIns="0" bIns="0" rtlCol="0" anchor="ctr"/>
+          <a:lstStyle/>
+          <a:p>
+            <a:pPr indent="0" marL="0">
+              <a:buNone/>
+            </a:pPr>
+            <a:r>
+              <a:rPr lang="en-US" sz="1000" dirty="0">
+                <a:solidFill>
+                  <a:srgbClr val="1E293B"/>
+                </a:solidFill>
+                <a:latin typeface="Arial" pitchFamily="34" charset="0"/>
+                <a:ea typeface="Arial" pitchFamily="34" charset="-122"/>
+                <a:cs typeface="Arial" pitchFamily="34" charset="-120"/>
+              </a:rPr>
+              <a:t>Phase 6 (Jul 5): Part 19 authorization package — 29/29 bundle committed · ScubaDrift verdicts wired · BOD 26-04 VDR/VER procedure · CA-7 ConMon cadence</a:t>
+            </a:r>
+            <a:endParaRPr lang="en-US" sz="1000" dirty="0"/>
+          </a:p>
+        </p:txBody>
+      </p:sp>
+      <p:sp>
+        <p:nvSpPr>
+          <p:cNvPr id="15" name="Shape 13"/>
+          <p:cNvSpPr/>
+          <p:nvPr/>
+        </p:nvSpPr>
+        <p:spPr>
+          <a:xfrm>
+            <a:off x="448056" y="3236976"/>
+            <a:ext cx="8339328" cy="795528"/>
+          </a:xfrm>
+          <a:prstGeom prst="roundRect">
+            <a:avLst>
+              <a:gd name="adj" fmla="val 10345"/>
+            </a:avLst>
+          </a:prstGeom>
+          <a:solidFill>
+            <a:srgbClr val="FFFFFF"/>
+          </a:solidFill>
+          <a:ln w="31750">
+            <a:solidFill>
+              <a:srgbClr val="D4860B"/>
+            </a:solidFill>
+            <a:prstDash val="solid"/>
+          </a:ln>
+          <a:effectLst>
+            <a:outerShdw sx="100000" sy="100000" kx="0" ky="0" algn="bl" rotWithShape="0" blurRad="88900" dist="25400" dir="2700000">
+              <a:srgbClr val="000000">
+                <a:alpha val="14000"/>
+              </a:srgbClr>
+            </a:outerShdw>
+          </a:effectLst>
+        </p:spPr>
+      </p:sp>
+      <p:sp>
+        <p:nvSpPr>
+          <p:cNvPr id="16" name="Shape 14"/>
+          <p:cNvSpPr/>
+          <p:nvPr/>
+        </p:nvSpPr>
+        <p:spPr>
+          <a:xfrm>
+            <a:off x="502920" y="3291840"/>
+            <a:ext cx="8229600" cy="685800"/>
+          </a:xfrm>
+          <a:prstGeom prst="roundRect">
+            <a:avLst>
+              <a:gd name="adj" fmla="val 9333"/>
+            </a:avLst>
+          </a:prstGeom>
+          <a:solidFill>
+            <a:srgbClr val="FBF3E4"/>
+          </a:solidFill>
+          <a:ln w="9525">
+            <a:solidFill>
+              <a:srgbClr val="C9D4E0"/>
+            </a:solidFill>
+            <a:prstDash val="solid"/>
+          </a:ln>
+          <a:effectLst>
+            <a:outerShdw sx="100000" sy="100000" kx="0" ky="0" algn="bl" rotWithShape="0" blurRad="88900" dist="25400" dir="2700000">
+              <a:srgbClr val="000000">
+                <a:alpha val="14000"/>
+              </a:srgbClr>
+            </a:outerShdw>
+          </a:effectLst>
+        </p:spPr>
+      </p:sp>
+      <p:sp>
+        <p:nvSpPr>
+          <p:cNvPr id="17" name="Text 15"/>
+          <p:cNvSpPr/>
+          <p:nvPr/>
+        </p:nvSpPr>
+        <p:spPr>
+          <a:xfrm>
+            <a:off x="731520" y="3346704"/>
+            <a:ext cx="7772400" cy="576072"/>
+          </a:xfrm>
+          <a:prstGeom prst="rect">
+            <a:avLst/>
+          </a:prstGeom>
+          <a:noFill/>
+          <a:ln/>
+        </p:spPr>
+        <p:txBody>
+          <a:bodyPr wrap="square" lIns="0" tIns="0" rIns="0" bIns="0" rtlCol="0" anchor="ctr"/>
+          <a:lstStyle/>
+          <a:p>
+            <a:pPr indent="0" marL="0">
+              <a:buNone/>
+            </a:pPr>
+            <a:r>
+              <a:rPr lang="en-US" sz="1100" b="1" dirty="0">
+                <a:solidFill>
+                  <a:srgbClr val="D4860B"/>
+                </a:solidFill>
+                <a:latin typeface="Arial" pitchFamily="34" charset="0"/>
+                <a:ea typeface="Arial" pitchFamily="34" charset="-122"/>
+                <a:cs typeface="Arial" pitchFamily="34" charset="-120"/>
+              </a:rPr>
+              <a:t>Phase 7 — submission   </a:t>
+            </a:r>
+            <a:pPr indent="0" marL="0">
+              <a:buNone/>
+            </a:pPr>
+            <a:r>
+              <a:rPr lang="en-US" sz="950" dirty="0">
+                <a:solidFill>
+                  <a:srgbClr val="1E293B"/>
+                </a:solidFill>
+                <a:latin typeface="Arial" pitchFamily="34" charset="0"/>
+                <a:ea typeface="Arial" pitchFamily="34" charset="-122"/>
+                <a:cs typeface="Arial" pitchFamily="34" charset="-120"/>
+              </a:rPr>
+              <a:t>Authorization package to FedRAMP PMO in the Class B/C window (opens Aug 31, 2026) · BOD 26-04 VDR/VER artifacts to CISA by Dec 7, 2026 · 20x ATO issued on the 29/29 AR</a:t>
+            </a:r>
+            <a:endParaRPr lang="en-US" sz="1100" dirty="0"/>
+          </a:p>
+        </p:txBody>
+      </p:sp>
+      <p:sp>
+        <p:nvSpPr>
+          <p:cNvPr id="18" name="Shape 16"/>
+          <p:cNvSpPr/>
+          <p:nvPr/>
+        </p:nvSpPr>
+        <p:spPr>
+          <a:xfrm>
+            <a:off x="502920" y="4069080"/>
+            <a:ext cx="8229600" cy="685800"/>
+          </a:xfrm>
+          <a:prstGeom prst="roundRect">
+            <a:avLst>
+              <a:gd name="adj" fmla="val 9333"/>
             </a:avLst>
           </a:prstGeom>
           <a:solidFill>
@@ -9443,14 +12027,14 @@
       </p:sp>
       <p:sp>
         <p:nvSpPr>
-          <p:cNvPr id="23" name="Text 21"/>
-          <p:cNvSpPr/>
-          <p:nvPr/>
-        </p:nvSpPr>
-        <p:spPr>
-          <a:xfrm>
-            <a:off x="731520" y="4434840"/>
-            <a:ext cx="7772400" cy="384048"/>
+          <p:cNvPr id="19" name="Text 17"/>
+          <p:cNvSpPr/>
+          <p:nvPr/>
+        </p:nvSpPr>
+        <p:spPr>
+          <a:xfrm>
+            <a:off x="731520" y="4123944"/>
+            <a:ext cx="7772400" cy="576072"/>
           </a:xfrm>
           <a:prstGeom prst="rect">
             <a:avLst/>
@@ -9466,7 +12050,7 @@
               <a:buNone/>
             </a:pPr>
             <a:r>
-              <a:rPr lang="en-US" sz="950" b="1" dirty="0">
+              <a:rPr lang="en-US" sz="1100" b="1" dirty="0">
                 <a:solidFill>
                   <a:srgbClr val="1F3A5F"/>
                 </a:solidFill>
@@ -9474,9 +12058,23 @@
                 <a:ea typeface="Arial" pitchFamily="34" charset="-122"/>
                 <a:cs typeface="Arial" pitchFamily="34" charset="-120"/>
               </a:rPr>
-              <a:t>The series is complete; the package is ready; the clocks are external now. The roadmap document carries the full sourced timeline and stays current — newest Date Code wins.</a:t>
-            </a:r>
-            <a:endParaRPr lang="en-US" sz="950" dirty="0"/>
+              <a:t>Phase 8 — ongoing ConMon   </a:t>
+            </a:r>
+            <a:pPr indent="0" marL="0">
+              <a:buNone/>
+            </a:pPr>
+            <a:r>
+              <a:rPr lang="en-US" sz="950" dirty="0">
+                <a:solidFill>
+                  <a:srgbClr val="1E293B"/>
+                </a:solidFill>
+                <a:latin typeface="Arial" pitchFamily="34" charset="0"/>
+                <a:ea typeface="Arial" pitchFamily="34" charset="-122"/>
+                <a:cs typeface="Arial" pitchFamily="34" charset="-120"/>
+              </a:rPr>
+              <a:t>Monthly bundle refresh + ScuBA assessment + POA&amp;M check · quarterly evidence-quality and training reviews · semi-annual IR drill and CP tabletop · annual full KSI re-assessment</a:t>
+            </a:r>
+            <a:endParaRPr lang="en-US" sz="1100" dirty="0"/>
           </a:p>
         </p:txBody>
       </p:sp>
